--- a/pptx/EOD-Company-Capital-Structure.pptx
+++ b/pptx/EOD-Company-Capital-Structure.pptx
@@ -451,6 +451,425 @@
     <c:autoTitleDeleted val="1"/>
     <c:plotArea>
       <c:layout/>
+      <c:barChart>
+        <c:barDir val="col"/>
+        <c:grouping val="stacked"/>
+        <c:varyColors val="0"/>
+        <c:ser>
+          <c:idx val="0"/>
+          <c:order val="0"/>
+          <c:tx>
+            <c:strRef>
+              <c:f>Sheet1!$B$1</c:f>
+              <c:strCache>
+                <c:ptCount val="1"/>
+                <c:pt idx="0">
+                  <c:v>Existing four parks</c:v>
+                </c:pt>
+              </c:strCache>
+            </c:strRef>
+          </c:tx>
+          <c:spPr>
+            <a:solidFill>
+              <a:srgbClr val="2B66EA"/>
+            </a:solidFill>
+            <a:effectLst/>
+          </c:spPr>
+          <c:invertIfNegative val="0"/>
+          <c:dLbls>
+            <c:numFmt formatCode="0.0" sourceLinked="0"/>
+            <c:txPr>
+              <a:bodyPr/>
+              <a:lstStyle/>
+              <a:p>
+                <a:pPr>
+                  <a:defRPr b="0" i="0" strike="noStrike" sz="900" u="none">
+                    <a:solidFill>
+                      <a:srgbClr val="3B4660"/>
+                    </a:solidFill>
+                    <a:latin typeface="Calibri"/>
+                  </a:defRPr>
+                </a:pPr>
+              </a:p>
+            </c:txPr>
+            <c:dLblPos val="ctr"/>
+            <c:showLegendKey val="0"/>
+            <c:showVal val="1"/>
+            <c:showCatName val="0"/>
+            <c:showSerName val="0"/>
+            <c:showPercent val="0"/>
+            <c:showBubbleSize val="0"/>
+            <c:showLeaderLines val="0"/>
+          </c:dLbls>
+          <c:cat>
+            <c:multiLvlStrRef>
+              <c:f>Sheet1!$A$2:$A$6</c:f>
+              <c:multiLvlStrCache>
+                <c:ptCount val="5"/>
+                <c:lvl>
+                  <c:pt idx="0">
+                    <c:v>FY26-27</c:v>
+                  </c:pt>
+                  <c:pt idx="1">
+                    <c:v>FY27-28</c:v>
+                  </c:pt>
+                  <c:pt idx="2">
+                    <c:v>FY28-29</c:v>
+                  </c:pt>
+                  <c:pt idx="3">
+                    <c:v>FY29-30</c:v>
+                  </c:pt>
+                  <c:pt idx="4">
+                    <c:v>FY30-31</c:v>
+                  </c:pt>
+                </c:lvl>
+              </c:multiLvlStrCache>
+            </c:multiLvlStrRef>
+          </c:cat>
+          <c:val>
+            <c:numRef>
+              <c:f>Sheet1!$B$2:$B$6</c:f>
+              <c:numCache>
+                <c:formatCode>General</c:formatCode>
+                <c:ptCount val="5"/>
+                <c:pt idx="0">
+                  <c:v>24</c:v>
+                </c:pt>
+                <c:pt idx="1">
+                  <c:v>33</c:v>
+                </c:pt>
+                <c:pt idx="2">
+                  <c:v>43.5</c:v>
+                </c:pt>
+                <c:pt idx="3">
+                  <c:v>51</c:v>
+                </c:pt>
+                <c:pt idx="4">
+                  <c:v>58</c:v>
+                </c:pt>
+              </c:numCache>
+            </c:numRef>
+          </c:val>
+        </c:ser>
+        <c:ser>
+          <c:idx val="1"/>
+          <c:order val="1"/>
+          <c:tx>
+            <c:strRef>
+              <c:f>Sheet1!$C$1</c:f>
+              <c:strCache>
+                <c:ptCount val="1"/>
+                <c:pt idx="0">
+                  <c:v>Geeta Govind Vatika</c:v>
+                </c:pt>
+              </c:strCache>
+            </c:strRef>
+          </c:tx>
+          <c:spPr>
+            <a:solidFill>
+              <a:srgbClr val="C8553D"/>
+            </a:solidFill>
+            <a:effectLst/>
+          </c:spPr>
+          <c:invertIfNegative val="0"/>
+          <c:dLbls>
+            <c:numFmt formatCode="0.0" sourceLinked="0"/>
+            <c:txPr>
+              <a:bodyPr/>
+              <a:lstStyle/>
+              <a:p>
+                <a:pPr>
+                  <a:defRPr b="0" i="0" strike="noStrike" sz="900" u="none">
+                    <a:solidFill>
+                      <a:srgbClr val="3B4660"/>
+                    </a:solidFill>
+                    <a:latin typeface="Calibri"/>
+                  </a:defRPr>
+                </a:pPr>
+              </a:p>
+            </c:txPr>
+            <c:dLblPos val="ctr"/>
+            <c:showLegendKey val="0"/>
+            <c:showVal val="1"/>
+            <c:showCatName val="0"/>
+            <c:showSerName val="0"/>
+            <c:showPercent val="0"/>
+            <c:showBubbleSize val="0"/>
+            <c:showLeaderLines val="0"/>
+          </c:dLbls>
+          <c:cat>
+            <c:multiLvlStrRef>
+              <c:f>Sheet1!$A$2:$A$6</c:f>
+              <c:multiLvlStrCache>
+                <c:ptCount val="5"/>
+                <c:lvl>
+                  <c:pt idx="0">
+                    <c:v>FY26-27</c:v>
+                  </c:pt>
+                  <c:pt idx="1">
+                    <c:v>FY27-28</c:v>
+                  </c:pt>
+                  <c:pt idx="2">
+                    <c:v>FY28-29</c:v>
+                  </c:pt>
+                  <c:pt idx="3">
+                    <c:v>FY29-30</c:v>
+                  </c:pt>
+                  <c:pt idx="4">
+                    <c:v>FY30-31</c:v>
+                  </c:pt>
+                </c:lvl>
+              </c:multiLvlStrCache>
+            </c:multiLvlStrRef>
+          </c:cat>
+          <c:val>
+            <c:numRef>
+              <c:f>Sheet1!$C$2:$C$6</c:f>
+              <c:numCache>
+                <c:formatCode>General</c:formatCode>
+                <c:ptCount val="5"/>
+                <c:pt idx="0">
+                  <c:v>0.98</c:v>
+                </c:pt>
+                <c:pt idx="1">
+                  <c:v>2.33</c:v>
+                </c:pt>
+                <c:pt idx="2">
+                  <c:v>3.04</c:v>
+                </c:pt>
+                <c:pt idx="3">
+                  <c:v>3.64</c:v>
+                </c:pt>
+                <c:pt idx="4">
+                  <c:v>4.2</c:v>
+                </c:pt>
+              </c:numCache>
+            </c:numRef>
+          </c:val>
+        </c:ser>
+        <c:ser>
+          <c:idx val="2"/>
+          <c:order val="2"/>
+          <c:tx>
+            <c:strRef>
+              <c:f>Sheet1!$D$1</c:f>
+              <c:strCache>
+                <c:ptCount val="1"/>
+                <c:pt idx="0">
+                  <c:v>Ramayan Vatika</c:v>
+                </c:pt>
+              </c:strCache>
+            </c:strRef>
+          </c:tx>
+          <c:spPr>
+            <a:solidFill>
+              <a:srgbClr val="10B981"/>
+            </a:solidFill>
+            <a:effectLst/>
+          </c:spPr>
+          <c:invertIfNegative val="0"/>
+          <c:dLbls>
+            <c:numFmt formatCode="0.0" sourceLinked="0"/>
+            <c:txPr>
+              <a:bodyPr/>
+              <a:lstStyle/>
+              <a:p>
+                <a:pPr>
+                  <a:defRPr b="0" i="0" strike="noStrike" sz="900" u="none">
+                    <a:solidFill>
+                      <a:srgbClr val="3B4660"/>
+                    </a:solidFill>
+                    <a:latin typeface="Calibri"/>
+                  </a:defRPr>
+                </a:pPr>
+              </a:p>
+            </c:txPr>
+            <c:dLblPos val="ctr"/>
+            <c:showLegendKey val="0"/>
+            <c:showVal val="1"/>
+            <c:showCatName val="0"/>
+            <c:showSerName val="0"/>
+            <c:showPercent val="0"/>
+            <c:showBubbleSize val="0"/>
+            <c:showLeaderLines val="0"/>
+          </c:dLbls>
+          <c:cat>
+            <c:multiLvlStrRef>
+              <c:f>Sheet1!$A$2:$A$6</c:f>
+              <c:multiLvlStrCache>
+                <c:ptCount val="5"/>
+                <c:lvl>
+                  <c:pt idx="0">
+                    <c:v>FY26-27</c:v>
+                  </c:pt>
+                  <c:pt idx="1">
+                    <c:v>FY27-28</c:v>
+                  </c:pt>
+                  <c:pt idx="2">
+                    <c:v>FY28-29</c:v>
+                  </c:pt>
+                  <c:pt idx="3">
+                    <c:v>FY29-30</c:v>
+                  </c:pt>
+                  <c:pt idx="4">
+                    <c:v>FY30-31</c:v>
+                  </c:pt>
+                </c:lvl>
+              </c:multiLvlStrCache>
+            </c:multiLvlStrRef>
+          </c:cat>
+          <c:val>
+            <c:numRef>
+              <c:f>Sheet1!$D$2:$D$6</c:f>
+              <c:numCache>
+                <c:formatCode>General</c:formatCode>
+                <c:ptCount val="5"/>
+                <c:pt idx="0">
+                  <c:v>0</c:v>
+                </c:pt>
+                <c:pt idx="1">
+                  <c:v>1.54</c:v>
+                </c:pt>
+                <c:pt idx="2">
+                  <c:v>2.16</c:v>
+                </c:pt>
+                <c:pt idx="3">
+                  <c:v>2.82</c:v>
+                </c:pt>
+                <c:pt idx="4">
+                  <c:v>3.21</c:v>
+                </c:pt>
+              </c:numCache>
+            </c:numRef>
+          </c:val>
+        </c:ser>
+        <c:ser>
+          <c:idx val="3"/>
+          <c:order val="3"/>
+          <c:tx>
+            <c:strRef>
+              <c:f>Sheet1!$E$1</c:f>
+              <c:strCache>
+                <c:ptCount val="1"/>
+                <c:pt idx="0">
+                  <c:v>Karnal</c:v>
+                </c:pt>
+              </c:strCache>
+            </c:strRef>
+          </c:tx>
+          <c:spPr>
+            <a:solidFill>
+              <a:srgbClr val="D97706"/>
+            </a:solidFill>
+            <a:effectLst/>
+          </c:spPr>
+          <c:invertIfNegative val="0"/>
+          <c:dLbls>
+            <c:numFmt formatCode="0.0" sourceLinked="0"/>
+            <c:txPr>
+              <a:bodyPr/>
+              <a:lstStyle/>
+              <a:p>
+                <a:pPr>
+                  <a:defRPr b="0" i="0" strike="noStrike" sz="900" u="none">
+                    <a:solidFill>
+                      <a:srgbClr val="3B4660"/>
+                    </a:solidFill>
+                    <a:latin typeface="Calibri"/>
+                  </a:defRPr>
+                </a:pPr>
+              </a:p>
+            </c:txPr>
+            <c:dLblPos val="ctr"/>
+            <c:showLegendKey val="0"/>
+            <c:showVal val="1"/>
+            <c:showCatName val="0"/>
+            <c:showSerName val="0"/>
+            <c:showPercent val="0"/>
+            <c:showBubbleSize val="0"/>
+            <c:showLeaderLines val="0"/>
+          </c:dLbls>
+          <c:cat>
+            <c:multiLvlStrRef>
+              <c:f>Sheet1!$A$2:$A$6</c:f>
+              <c:multiLvlStrCache>
+                <c:ptCount val="5"/>
+                <c:lvl>
+                  <c:pt idx="0">
+                    <c:v>FY26-27</c:v>
+                  </c:pt>
+                  <c:pt idx="1">
+                    <c:v>FY27-28</c:v>
+                  </c:pt>
+                  <c:pt idx="2">
+                    <c:v>FY28-29</c:v>
+                  </c:pt>
+                  <c:pt idx="3">
+                    <c:v>FY29-30</c:v>
+                  </c:pt>
+                  <c:pt idx="4">
+                    <c:v>FY30-31</c:v>
+                  </c:pt>
+                </c:lvl>
+              </c:multiLvlStrCache>
+            </c:multiLvlStrRef>
+          </c:cat>
+          <c:val>
+            <c:numRef>
+              <c:f>Sheet1!$E$2:$E$6</c:f>
+              <c:numCache>
+                <c:formatCode>General</c:formatCode>
+                <c:ptCount val="5"/>
+                <c:pt idx="0">
+                  <c:v>0</c:v>
+                </c:pt>
+                <c:pt idx="1">
+                  <c:v>0.75</c:v>
+                </c:pt>
+                <c:pt idx="2">
+                  <c:v>3.25</c:v>
+                </c:pt>
+                <c:pt idx="3">
+                  <c:v>4</c:v>
+                </c:pt>
+                <c:pt idx="4">
+                  <c:v>4.6</c:v>
+                </c:pt>
+              </c:numCache>
+            </c:numRef>
+          </c:val>
+        </c:ser>
+        <c:dLbls>
+          <c:numFmt formatCode="0.0" sourceLinked="0"/>
+          <c:txPr>
+            <a:bodyPr/>
+            <a:lstStyle/>
+            <a:p>
+              <a:pPr>
+                <a:defRPr b="0" i="0" strike="noStrike" sz="900" u="none">
+                  <a:solidFill>
+                    <a:srgbClr val="3B4660"/>
+                  </a:solidFill>
+                  <a:latin typeface="Calibri"/>
+                </a:defRPr>
+              </a:pPr>
+            </a:p>
+          </c:txPr>
+          <c:dLblPos val="ctr"/>
+          <c:showLegendKey val="0"/>
+          <c:showVal val="1"/>
+          <c:showCatName val="0"/>
+          <c:showSerName val="0"/>
+          <c:showPercent val="0"/>
+          <c:showBubbleSize val="0"/>
+          <c:showLeaderLines val="0"/>
+        </c:dLbls>
+        <c:gapWidth val="45"/>
+        <c:overlap val="100"/>
+        <c:axId val="2094734554"/>
+        <c:axId val="2094734552"/>
+        <c:axId val="2094734556"/>
+      </c:barChart>
       <c:catAx>
         <c:axId val="2094734554"/>
         <c:scaling>
@@ -2820,7 +3239,7 @@
         <p:spPr>
           <a:xfrm>
             <a:off x="566928" y="2706624"/>
-            <a:ext cx="10241280" cy="619252"/>
+            <a:ext cx="10241280" cy="607568"/>
           </a:xfrm>
           <a:prstGeom prst="rect">
             <a:avLst/>
@@ -2861,7 +3280,7 @@
         </p:nvSpPr>
         <p:spPr>
           <a:xfrm>
-            <a:off x="566928" y="3472180"/>
+            <a:off x="566928" y="3460496"/>
             <a:ext cx="10241280" cy="694944"/>
           </a:xfrm>
           <a:prstGeom prst="rect">
@@ -3043,7 +3462,7 @@
             <a:r>
               <a:rPr lang="en-US" sz="1000" dirty="0">
                 <a:solidFill>
-                  <a:srgbClr val="7C889B"/>
+                  <a:srgbClr val="A8B2C4"/>
                 </a:solidFill>
                 <a:latin typeface="Calibri" pitchFamily="34" charset="0"/>
                 <a:ea typeface="Calibri" pitchFamily="34" charset="-122"/>
@@ -3163,7 +3582,7 @@
             <a:r>
               <a:rPr lang="en-US" sz="1000" dirty="0">
                 <a:solidFill>
-                  <a:srgbClr val="7C889B"/>
+                  <a:srgbClr val="A8B2C4"/>
                 </a:solidFill>
                 <a:latin typeface="Calibri" pitchFamily="34" charset="0"/>
                 <a:ea typeface="Calibri" pitchFamily="34" charset="-122"/>
@@ -3283,7 +3702,7 @@
             <a:r>
               <a:rPr lang="en-US" sz="1000" dirty="0">
                 <a:solidFill>
-                  <a:srgbClr val="7C889B"/>
+                  <a:srgbClr val="A8B2C4"/>
                 </a:solidFill>
                 <a:latin typeface="Calibri" pitchFamily="34" charset="0"/>
                 <a:ea typeface="Calibri" pitchFamily="34" charset="-122"/>
@@ -3403,7 +3822,7 @@
             <a:r>
               <a:rPr lang="en-US" sz="1000" dirty="0">
                 <a:solidFill>
-                  <a:srgbClr val="7C889B"/>
+                  <a:srgbClr val="A8B2C4"/>
                 </a:solidFill>
                 <a:latin typeface="Calibri" pitchFamily="34" charset="0"/>
                 <a:ea typeface="Calibri" pitchFamily="34" charset="-122"/>
@@ -4328,8 +4747,8 @@
         </p:nvSpPr>
         <p:spPr>
           <a:xfrm>
-            <a:off x="566928" y="1005840"/>
-            <a:ext cx="11057839" cy="512064"/>
+            <a:off x="566928" y="950976"/>
+            <a:ext cx="11057839" cy="231140"/>
           </a:xfrm>
           <a:prstGeom prst="rect">
             <a:avLst/>
@@ -4343,12 +4762,12 @@
           <a:p>
             <a:pPr indent="0" marL="0">
               <a:lnSpc>
-                <a:spcPts val="1900"/>
+                <a:spcPts val="1750"/>
               </a:lnSpc>
               <a:buNone/>
             </a:pPr>
             <a:r>
-              <a:rPr lang="en-US" sz="1350" dirty="0">
+              <a:rPr lang="en-US" sz="1250" dirty="0">
                 <a:solidFill>
                   <a:srgbClr val="3B4660"/>
                 </a:solidFill>
@@ -4358,7 +4777,7 @@
               </a:rPr>
               <a:t>Only what determines whether VAPPL can borrow, and at what price.</a:t>
             </a:r>
-            <a:endParaRPr lang="en-US" sz="1350" dirty="0"/>
+            <a:endParaRPr lang="en-US" sz="1250" dirty="0"/>
           </a:p>
         </p:txBody>
       </p:sp>
@@ -4377,7 +4796,7 @@
           </p:nvPr>
         </p:nvGraphicFramePr>
         <p:xfrm>
-          <a:off x="566928" y="1627632"/>
+          <a:off x="566928" y="1310132"/>
           <a:ext cx="11057839" cy="914400"/>
         </p:xfrm>
         <a:graphic>
@@ -6049,12 +6468,12 @@
         </p:nvSpPr>
         <p:spPr>
           <a:xfrm>
-            <a:off x="566928" y="4425696"/>
-            <a:ext cx="11057839" cy="1640690"/>
+            <a:off x="566928" y="4108196"/>
+            <a:ext cx="11057839" cy="1512428"/>
           </a:xfrm>
           <a:prstGeom prst="roundRect">
             <a:avLst>
-              <a:gd name="adj" fmla="val 2787"/>
+              <a:gd name="adj" fmla="val 3023"/>
             </a:avLst>
           </a:prstGeom>
           <a:solidFill>
@@ -6076,8 +6495,8 @@
         </p:nvSpPr>
         <p:spPr>
           <a:xfrm>
-            <a:off x="804672" y="4572000"/>
-            <a:ext cx="2743200" cy="201168"/>
+            <a:off x="804672" y="4217924"/>
+            <a:ext cx="2743200" cy="182880"/>
           </a:xfrm>
           <a:prstGeom prst="rect">
             <a:avLst/>
@@ -6115,8 +6534,8 @@
         </p:nvSpPr>
         <p:spPr>
           <a:xfrm>
-            <a:off x="804672" y="4773168"/>
-            <a:ext cx="10582351" cy="294145"/>
+            <a:off x="804672" y="4400804"/>
+            <a:ext cx="10582351" cy="288595"/>
           </a:xfrm>
           <a:prstGeom prst="rect">
             <a:avLst/>
@@ -6157,8 +6576,8 @@
         </p:nvSpPr>
         <p:spPr>
           <a:xfrm>
-            <a:off x="804672" y="5140465"/>
-            <a:ext cx="10582351" cy="852769"/>
+            <a:off x="804672" y="4744263"/>
+            <a:ext cx="10582351" cy="803209"/>
           </a:xfrm>
           <a:prstGeom prst="rect">
             <a:avLst/>
@@ -6368,8 +6787,8 @@
         </p:nvSpPr>
         <p:spPr>
           <a:xfrm>
-            <a:off x="566928" y="1005840"/>
-            <a:ext cx="11057839" cy="512064"/>
+            <a:off x="566928" y="950976"/>
+            <a:ext cx="11057839" cy="231140"/>
           </a:xfrm>
           <a:prstGeom prst="rect">
             <a:avLst/>
@@ -6383,12 +6802,12 @@
           <a:p>
             <a:pPr indent="0" marL="0">
               <a:lnSpc>
-                <a:spcPts val="1900"/>
+                <a:spcPts val="1750"/>
               </a:lnSpc>
               <a:buNone/>
             </a:pPr>
             <a:r>
-              <a:rPr lang="en-US" sz="1350" dirty="0">
+              <a:rPr lang="en-US" sz="1250" dirty="0">
                 <a:solidFill>
                   <a:srgbClr val="3B4660"/>
                 </a:solidFill>
@@ -6398,7 +6817,7 @@
               </a:rPr>
               <a:t>CGTMSE covers micro and small enterprises only. VAPPL's eligibility is not marginal — but it has an expiry date, and the date is inside this plan.</a:t>
             </a:r>
-            <a:endParaRPr lang="en-US" sz="1350" dirty="0"/>
+            <a:endParaRPr lang="en-US" sz="1250" dirty="0"/>
           </a:p>
         </p:txBody>
       </p:sp>
@@ -6410,12 +6829,12 @@
         </p:nvSpPr>
         <p:spPr>
           <a:xfrm>
-            <a:off x="566928" y="1627632"/>
-            <a:ext cx="3539642" cy="1243584"/>
+            <a:off x="566928" y="1310132"/>
+            <a:ext cx="3539642" cy="1170432"/>
           </a:xfrm>
           <a:prstGeom prst="roundRect">
             <a:avLst>
-              <a:gd name="adj" fmla="val 4412"/>
+              <a:gd name="adj" fmla="val 4688"/>
             </a:avLst>
           </a:prstGeom>
           <a:solidFill>
@@ -6437,8 +6856,8 @@
         </p:nvSpPr>
         <p:spPr>
           <a:xfrm>
-            <a:off x="749808" y="1764792"/>
-            <a:ext cx="3173882" cy="219456"/>
+            <a:off x="749808" y="1429004"/>
+            <a:ext cx="3173882" cy="237744"/>
           </a:xfrm>
           <a:prstGeom prst="rect">
             <a:avLst/>
@@ -6447,14 +6866,14 @@
           <a:ln/>
         </p:spPr>
         <p:txBody>
-          <a:bodyPr wrap="square" lIns="0" tIns="0" rIns="0" bIns="0" rtlCol="0" anchor="ctr"/>
+          <a:bodyPr wrap="square" lIns="0" tIns="0" rIns="0" bIns="0" rtlCol="0" anchor="t"/>
           <a:lstStyle/>
           <a:p>
             <a:pPr indent="0" marL="0">
               <a:buNone/>
             </a:pPr>
             <a:r>
-              <a:rPr lang="en-US" sz="900" b="1" spc="120" kern="0" dirty="0">
+              <a:rPr lang="en-US" sz="850" b="1" spc="100" kern="0" dirty="0">
                 <a:solidFill>
                   <a:srgbClr val="6E7689"/>
                 </a:solidFill>
@@ -6464,7 +6883,7 @@
               </a:rPr>
               <a:t>INVESTMENT IN PLANT &amp; MACHINERY</a:t>
             </a:r>
-            <a:endParaRPr lang="en-US" sz="900" dirty="0"/>
+            <a:endParaRPr lang="en-US" sz="850" dirty="0"/>
           </a:p>
         </p:txBody>
       </p:sp>
@@ -6476,7 +6895,7 @@
         </p:nvSpPr>
         <p:spPr>
           <a:xfrm>
-            <a:off x="749808" y="1993392"/>
+            <a:off x="749808" y="1675892"/>
             <a:ext cx="3173882" cy="457200"/>
           </a:xfrm>
           <a:prstGeom prst="rect">
@@ -6486,7 +6905,9 @@
           <a:ln/>
         </p:spPr>
         <p:txBody>
-          <a:bodyPr wrap="square" lIns="0" tIns="0" rIns="0" bIns="0" rtlCol="0" anchor="t"/>
+          <a:bodyPr wrap="square" lIns="0" tIns="0" rIns="0" bIns="0" rtlCol="0" anchor="t">
+            <a:normAutofit/>
+          </a:bodyPr>
           <a:lstStyle/>
           <a:p>
             <a:pPr indent="0" marL="0">
@@ -6515,8 +6936,8 @@
         </p:nvSpPr>
         <p:spPr>
           <a:xfrm>
-            <a:off x="749808" y="2468880"/>
-            <a:ext cx="3173882" cy="329184"/>
+            <a:off x="749808" y="2151380"/>
+            <a:ext cx="3173882" cy="256032"/>
           </a:xfrm>
           <a:prstGeom prst="rect">
             <a:avLst/>
@@ -6557,12 +6978,12 @@
         </p:nvSpPr>
         <p:spPr>
           <a:xfrm>
-            <a:off x="4326026" y="1627632"/>
-            <a:ext cx="3539642" cy="1243584"/>
+            <a:off x="4326026" y="1310132"/>
+            <a:ext cx="3539642" cy="1170432"/>
           </a:xfrm>
           <a:prstGeom prst="roundRect">
             <a:avLst>
-              <a:gd name="adj" fmla="val 4412"/>
+              <a:gd name="adj" fmla="val 4688"/>
             </a:avLst>
           </a:prstGeom>
           <a:solidFill>
@@ -6584,8 +7005,8 @@
         </p:nvSpPr>
         <p:spPr>
           <a:xfrm>
-            <a:off x="4508906" y="1764792"/>
-            <a:ext cx="3173882" cy="219456"/>
+            <a:off x="4508906" y="1429004"/>
+            <a:ext cx="3173882" cy="237744"/>
           </a:xfrm>
           <a:prstGeom prst="rect">
             <a:avLst/>
@@ -6594,14 +7015,14 @@
           <a:ln/>
         </p:spPr>
         <p:txBody>
-          <a:bodyPr wrap="square" lIns="0" tIns="0" rIns="0" bIns="0" rtlCol="0" anchor="ctr"/>
+          <a:bodyPr wrap="square" lIns="0" tIns="0" rIns="0" bIns="0" rtlCol="0" anchor="t"/>
           <a:lstStyle/>
           <a:p>
             <a:pPr indent="0" marL="0">
               <a:buNone/>
             </a:pPr>
             <a:r>
-              <a:rPr lang="en-US" sz="900" b="1" spc="120" kern="0" dirty="0">
+              <a:rPr lang="en-US" sz="850" b="1" spc="100" kern="0" dirty="0">
                 <a:solidFill>
                   <a:srgbClr val="6E7689"/>
                 </a:solidFill>
@@ -6611,7 +7032,7 @@
               </a:rPr>
               <a:t>ANNUAL TURNOVER</a:t>
             </a:r>
-            <a:endParaRPr lang="en-US" sz="900" dirty="0"/>
+            <a:endParaRPr lang="en-US" sz="850" dirty="0"/>
           </a:p>
         </p:txBody>
       </p:sp>
@@ -6623,7 +7044,7 @@
         </p:nvSpPr>
         <p:spPr>
           <a:xfrm>
-            <a:off x="4508906" y="1993392"/>
+            <a:off x="4508906" y="1675892"/>
             <a:ext cx="3173882" cy="457200"/>
           </a:xfrm>
           <a:prstGeom prst="rect">
@@ -6633,7 +7054,9 @@
           <a:ln/>
         </p:spPr>
         <p:txBody>
-          <a:bodyPr wrap="square" lIns="0" tIns="0" rIns="0" bIns="0" rtlCol="0" anchor="t"/>
+          <a:bodyPr wrap="square" lIns="0" tIns="0" rIns="0" bIns="0" rtlCol="0" anchor="t">
+            <a:normAutofit/>
+          </a:bodyPr>
           <a:lstStyle/>
           <a:p>
             <a:pPr indent="0" marL="0">
@@ -6662,8 +7085,8 @@
         </p:nvSpPr>
         <p:spPr>
           <a:xfrm>
-            <a:off x="4508906" y="2468880"/>
-            <a:ext cx="3173882" cy="329184"/>
+            <a:off x="4508906" y="2151380"/>
+            <a:ext cx="3173882" cy="256032"/>
           </a:xfrm>
           <a:prstGeom prst="rect">
             <a:avLst/>
@@ -6704,12 +7127,12 @@
         </p:nvSpPr>
         <p:spPr>
           <a:xfrm>
-            <a:off x="8085125" y="1627632"/>
-            <a:ext cx="3539642" cy="1243584"/>
+            <a:off x="8085125" y="1310132"/>
+            <a:ext cx="3539642" cy="1170432"/>
           </a:xfrm>
           <a:prstGeom prst="roundRect">
             <a:avLst>
-              <a:gd name="adj" fmla="val 4412"/>
+              <a:gd name="adj" fmla="val 4688"/>
             </a:avLst>
           </a:prstGeom>
           <a:solidFill>
@@ -6731,8 +7154,8 @@
         </p:nvSpPr>
         <p:spPr>
           <a:xfrm>
-            <a:off x="8268005" y="1764792"/>
-            <a:ext cx="3173882" cy="219456"/>
+            <a:off x="8268005" y="1429004"/>
+            <a:ext cx="3173882" cy="237744"/>
           </a:xfrm>
           <a:prstGeom prst="rect">
             <a:avLst/>
@@ -6741,14 +7164,14 @@
           <a:ln/>
         </p:spPr>
         <p:txBody>
-          <a:bodyPr wrap="square" lIns="0" tIns="0" rIns="0" bIns="0" rtlCol="0" anchor="ctr"/>
+          <a:bodyPr wrap="square" lIns="0" tIns="0" rIns="0" bIns="0" rtlCol="0" anchor="t"/>
           <a:lstStyle/>
           <a:p>
             <a:pPr indent="0" marL="0">
               <a:buNone/>
             </a:pPr>
             <a:r>
-              <a:rPr lang="en-US" sz="900" b="1" spc="120" kern="0" dirty="0">
+              <a:rPr lang="en-US" sz="850" b="1" spc="100" kern="0" dirty="0">
                 <a:solidFill>
                   <a:srgbClr val="6E7689"/>
                 </a:solidFill>
@@ -6758,7 +7181,7 @@
               </a:rPr>
               <a:t>CLASSIFICATION</a:t>
             </a:r>
-            <a:endParaRPr lang="en-US" sz="900" dirty="0"/>
+            <a:endParaRPr lang="en-US" sz="850" dirty="0"/>
           </a:p>
         </p:txBody>
       </p:sp>
@@ -6770,7 +7193,7 @@
         </p:nvSpPr>
         <p:spPr>
           <a:xfrm>
-            <a:off x="8268005" y="1993392"/>
+            <a:off x="8268005" y="1675892"/>
             <a:ext cx="3173882" cy="457200"/>
           </a:xfrm>
           <a:prstGeom prst="rect">
@@ -6780,7 +7203,9 @@
           <a:ln/>
         </p:spPr>
         <p:txBody>
-          <a:bodyPr wrap="square" lIns="0" tIns="0" rIns="0" bIns="0" rtlCol="0" anchor="t"/>
+          <a:bodyPr wrap="square" lIns="0" tIns="0" rIns="0" bIns="0" rtlCol="0" anchor="t">
+            <a:normAutofit/>
+          </a:bodyPr>
           <a:lstStyle/>
           <a:p>
             <a:pPr indent="0" marL="0">
@@ -6809,8 +7234,8 @@
         </p:nvSpPr>
         <p:spPr>
           <a:xfrm>
-            <a:off x="8268005" y="2468880"/>
-            <a:ext cx="3173882" cy="329184"/>
+            <a:off x="8268005" y="2151380"/>
+            <a:ext cx="3173882" cy="256032"/>
           </a:xfrm>
           <a:prstGeom prst="rect">
             <a:avLst/>
@@ -6858,7 +7283,7 @@
           </p:nvPr>
         </p:nvGraphicFramePr>
         <p:xfrm>
-          <a:off x="566928" y="3108960"/>
+          <a:off x="566928" y="2718308"/>
           <a:ext cx="11057839" cy="914400"/>
         </p:xfrm>
         <a:graphic>
@@ -7025,420 +7450,6 @@
                           <a:ea typeface="Calibri" pitchFamily="34" charset="-122"/>
                           <a:cs typeface="Calibri" pitchFamily="34" charset="-120"/>
                         </a:rPr>
-                        <a:t>Up to ₹10 lakh</a:t>
-                      </a:r>
-                      <a:endParaRPr lang="en-US" sz="1050" dirty="0">
-                        <a:latin typeface="Calibri" charset="0"/>
-                        <a:ea typeface="Calibri" charset="0"/>
-                        <a:cs typeface="Calibri" charset="0"/>
-                      </a:endParaRPr>
-                    </a:p>
-                  </a:txBody>
-                  <a:tcPr marL="0" marR="76200" marT="63500" marB="63500" anchor="ctr">
-                    <a:lnL w="0" cap="flat" cmpd="sng" algn="ctr">
-                      <a:solidFill>
-                        <a:srgbClr val="666666"/>
-                      </a:solidFill>
-                      <a:prstDash val="solid"/>
-                      <a:round/>
-                      <a:headEnd type="none" w="med" len="med"/>
-                      <a:tailEnd type="none" w="med" len="med"/>
-                    </a:lnL>
-                    <a:lnR w="0" cap="flat" cmpd="sng" algn="ctr">
-                      <a:solidFill>
-                        <a:srgbClr val="666666"/>
-                      </a:solidFill>
-                      <a:prstDash val="solid"/>
-                      <a:round/>
-                      <a:headEnd type="none" w="med" len="med"/>
-                      <a:tailEnd type="none" w="med" len="med"/>
-                    </a:lnR>
-                    <a:lnT w="0" cap="flat" cmpd="sng" algn="ctr">
-                      <a:solidFill>
-                        <a:srgbClr val="666666"/>
-                      </a:solidFill>
-                      <a:prstDash val="solid"/>
-                      <a:round/>
-                      <a:headEnd type="none" w="med" len="med"/>
-                      <a:tailEnd type="none" w="med" len="med"/>
-                    </a:lnT>
-                    <a:lnB w="7620" cap="flat" cmpd="sng" algn="ctr">
-                      <a:solidFill>
-                        <a:srgbClr val="E2E4EA"/>
-                      </a:solidFill>
-                      <a:prstDash val="solid"/>
-                      <a:round/>
-                      <a:headEnd type="none" w="med" len="med"/>
-                      <a:tailEnd type="none" w="med" len="med"/>
-                    </a:lnB>
-                    <a:solidFill>
-                      <a:srgbClr val="FFFFFF"/>
-                    </a:solidFill>
-                  </a:tcPr>
-                </a:tc>
-                <a:tc>
-                  <a:txBody>
-                    <a:bodyPr/>
-                    <a:lstStyle/>
-                    <a:p>
-                      <a:pPr algn="r" indent="0" marL="0">
-                        <a:buNone/>
-                      </a:pPr>
-                      <a:r>
-                        <a:rPr lang="en-US" sz="1050" dirty="0">
-                          <a:solidFill>
-                            <a:srgbClr val="3B4660"/>
-                          </a:solidFill>
-                          <a:latin typeface="Calibri" pitchFamily="34" charset="0"/>
-                          <a:ea typeface="Calibri" pitchFamily="34" charset="-122"/>
-                          <a:cs typeface="Calibri" pitchFamily="34" charset="-120"/>
-                        </a:rPr>
-                        <a:t>0.37%</a:t>
-                      </a:r>
-                      <a:endParaRPr lang="en-US" sz="1050" dirty="0">
-                        <a:latin typeface="Calibri" charset="0"/>
-                        <a:ea typeface="Calibri" charset="0"/>
-                        <a:cs typeface="Calibri" charset="0"/>
-                      </a:endParaRPr>
-                    </a:p>
-                  </a:txBody>
-                  <a:tcPr marL="0" marR="76200" marT="63500" marB="63500" anchor="ctr">
-                    <a:lnL w="0" cap="flat" cmpd="sng" algn="ctr">
-                      <a:solidFill>
-                        <a:srgbClr val="666666"/>
-                      </a:solidFill>
-                      <a:prstDash val="solid"/>
-                      <a:round/>
-                      <a:headEnd type="none" w="med" len="med"/>
-                      <a:tailEnd type="none" w="med" len="med"/>
-                    </a:lnL>
-                    <a:lnR w="0" cap="flat" cmpd="sng" algn="ctr">
-                      <a:solidFill>
-                        <a:srgbClr val="666666"/>
-                      </a:solidFill>
-                      <a:prstDash val="solid"/>
-                      <a:round/>
-                      <a:headEnd type="none" w="med" len="med"/>
-                      <a:tailEnd type="none" w="med" len="med"/>
-                    </a:lnR>
-                    <a:lnT w="0" cap="flat" cmpd="sng" algn="ctr">
-                      <a:solidFill>
-                        <a:srgbClr val="666666"/>
-                      </a:solidFill>
-                      <a:prstDash val="solid"/>
-                      <a:round/>
-                      <a:headEnd type="none" w="med" len="med"/>
-                      <a:tailEnd type="none" w="med" len="med"/>
-                    </a:lnT>
-                    <a:lnB w="7620" cap="flat" cmpd="sng" algn="ctr">
-                      <a:solidFill>
-                        <a:srgbClr val="E2E4EA"/>
-                      </a:solidFill>
-                      <a:prstDash val="solid"/>
-                      <a:round/>
-                      <a:headEnd type="none" w="med" len="med"/>
-                      <a:tailEnd type="none" w="med" len="med"/>
-                    </a:lnB>
-                    <a:solidFill>
-                      <a:srgbClr val="FFFFFF"/>
-                    </a:solidFill>
-                  </a:tcPr>
-                </a:tc>
-              </a:tr>
-              <a:tr h="256032">
-                <a:tc>
-                  <a:txBody>
-                    <a:bodyPr/>
-                    <a:lstStyle/>
-                    <a:p>
-                      <a:pPr algn="l" indent="0" marL="0">
-                        <a:buNone/>
-                      </a:pPr>
-                      <a:r>
-                        <a:rPr lang="en-US" sz="1050" dirty="0">
-                          <a:solidFill>
-                            <a:srgbClr val="3B4660"/>
-                          </a:solidFill>
-                          <a:latin typeface="Calibri" pitchFamily="34" charset="0"/>
-                          <a:ea typeface="Calibri" pitchFamily="34" charset="-122"/>
-                          <a:cs typeface="Calibri" pitchFamily="34" charset="-120"/>
-                        </a:rPr>
-                        <a:t>Above ₹10 lakh and up to ₹50 lakh</a:t>
-                      </a:r>
-                      <a:endParaRPr lang="en-US" sz="1050" dirty="0">
-                        <a:latin typeface="Calibri" charset="0"/>
-                        <a:ea typeface="Calibri" charset="0"/>
-                        <a:cs typeface="Calibri" charset="0"/>
-                      </a:endParaRPr>
-                    </a:p>
-                  </a:txBody>
-                  <a:tcPr marL="0" marR="76200" marT="63500" marB="63500" anchor="ctr">
-                    <a:lnL w="0" cap="flat" cmpd="sng" algn="ctr">
-                      <a:solidFill>
-                        <a:srgbClr val="666666"/>
-                      </a:solidFill>
-                      <a:prstDash val="solid"/>
-                      <a:round/>
-                      <a:headEnd type="none" w="med" len="med"/>
-                      <a:tailEnd type="none" w="med" len="med"/>
-                    </a:lnL>
-                    <a:lnR w="0" cap="flat" cmpd="sng" algn="ctr">
-                      <a:solidFill>
-                        <a:srgbClr val="666666"/>
-                      </a:solidFill>
-                      <a:prstDash val="solid"/>
-                      <a:round/>
-                      <a:headEnd type="none" w="med" len="med"/>
-                      <a:tailEnd type="none" w="med" len="med"/>
-                    </a:lnR>
-                    <a:lnT w="0" cap="flat" cmpd="sng" algn="ctr">
-                      <a:solidFill>
-                        <a:srgbClr val="666666"/>
-                      </a:solidFill>
-                      <a:prstDash val="solid"/>
-                      <a:round/>
-                      <a:headEnd type="none" w="med" len="med"/>
-                      <a:tailEnd type="none" w="med" len="med"/>
-                    </a:lnT>
-                    <a:lnB w="7620" cap="flat" cmpd="sng" algn="ctr">
-                      <a:solidFill>
-                        <a:srgbClr val="E2E4EA"/>
-                      </a:solidFill>
-                      <a:prstDash val="solid"/>
-                      <a:round/>
-                      <a:headEnd type="none" w="med" len="med"/>
-                      <a:tailEnd type="none" w="med" len="med"/>
-                    </a:lnB>
-                    <a:solidFill>
-                      <a:srgbClr val="FFFFFF"/>
-                    </a:solidFill>
-                  </a:tcPr>
-                </a:tc>
-                <a:tc>
-                  <a:txBody>
-                    <a:bodyPr/>
-                    <a:lstStyle/>
-                    <a:p>
-                      <a:pPr algn="r" indent="0" marL="0">
-                        <a:buNone/>
-                      </a:pPr>
-                      <a:r>
-                        <a:rPr lang="en-US" sz="1050" dirty="0">
-                          <a:solidFill>
-                            <a:srgbClr val="3B4660"/>
-                          </a:solidFill>
-                          <a:latin typeface="Calibri" pitchFamily="34" charset="0"/>
-                          <a:ea typeface="Calibri" pitchFamily="34" charset="-122"/>
-                          <a:cs typeface="Calibri" pitchFamily="34" charset="-120"/>
-                        </a:rPr>
-                        <a:t>0.55%</a:t>
-                      </a:r>
-                      <a:endParaRPr lang="en-US" sz="1050" dirty="0">
-                        <a:latin typeface="Calibri" charset="0"/>
-                        <a:ea typeface="Calibri" charset="0"/>
-                        <a:cs typeface="Calibri" charset="0"/>
-                      </a:endParaRPr>
-                    </a:p>
-                  </a:txBody>
-                  <a:tcPr marL="0" marR="76200" marT="63500" marB="63500" anchor="ctr">
-                    <a:lnL w="0" cap="flat" cmpd="sng" algn="ctr">
-                      <a:solidFill>
-                        <a:srgbClr val="666666"/>
-                      </a:solidFill>
-                      <a:prstDash val="solid"/>
-                      <a:round/>
-                      <a:headEnd type="none" w="med" len="med"/>
-                      <a:tailEnd type="none" w="med" len="med"/>
-                    </a:lnL>
-                    <a:lnR w="0" cap="flat" cmpd="sng" algn="ctr">
-                      <a:solidFill>
-                        <a:srgbClr val="666666"/>
-                      </a:solidFill>
-                      <a:prstDash val="solid"/>
-                      <a:round/>
-                      <a:headEnd type="none" w="med" len="med"/>
-                      <a:tailEnd type="none" w="med" len="med"/>
-                    </a:lnR>
-                    <a:lnT w="0" cap="flat" cmpd="sng" algn="ctr">
-                      <a:solidFill>
-                        <a:srgbClr val="666666"/>
-                      </a:solidFill>
-                      <a:prstDash val="solid"/>
-                      <a:round/>
-                      <a:headEnd type="none" w="med" len="med"/>
-                      <a:tailEnd type="none" w="med" len="med"/>
-                    </a:lnT>
-                    <a:lnB w="7620" cap="flat" cmpd="sng" algn="ctr">
-                      <a:solidFill>
-                        <a:srgbClr val="E2E4EA"/>
-                      </a:solidFill>
-                      <a:prstDash val="solid"/>
-                      <a:round/>
-                      <a:headEnd type="none" w="med" len="med"/>
-                      <a:tailEnd type="none" w="med" len="med"/>
-                    </a:lnB>
-                    <a:solidFill>
-                      <a:srgbClr val="FFFFFF"/>
-                    </a:solidFill>
-                  </a:tcPr>
-                </a:tc>
-              </a:tr>
-              <a:tr h="256032">
-                <a:tc>
-                  <a:txBody>
-                    <a:bodyPr/>
-                    <a:lstStyle/>
-                    <a:p>
-                      <a:pPr algn="l" indent="0" marL="0">
-                        <a:buNone/>
-                      </a:pPr>
-                      <a:r>
-                        <a:rPr lang="en-US" sz="1050" dirty="0">
-                          <a:solidFill>
-                            <a:srgbClr val="3B4660"/>
-                          </a:solidFill>
-                          <a:latin typeface="Calibri" pitchFamily="34" charset="0"/>
-                          <a:ea typeface="Calibri" pitchFamily="34" charset="-122"/>
-                          <a:cs typeface="Calibri" pitchFamily="34" charset="-120"/>
-                        </a:rPr>
-                        <a:t>Above ₹50 lakh and up to ₹1 crore</a:t>
-                      </a:r>
-                      <a:endParaRPr lang="en-US" sz="1050" dirty="0">
-                        <a:latin typeface="Calibri" charset="0"/>
-                        <a:ea typeface="Calibri" charset="0"/>
-                        <a:cs typeface="Calibri" charset="0"/>
-                      </a:endParaRPr>
-                    </a:p>
-                  </a:txBody>
-                  <a:tcPr marL="0" marR="76200" marT="63500" marB="63500" anchor="ctr">
-                    <a:lnL w="0" cap="flat" cmpd="sng" algn="ctr">
-                      <a:solidFill>
-                        <a:srgbClr val="666666"/>
-                      </a:solidFill>
-                      <a:prstDash val="solid"/>
-                      <a:round/>
-                      <a:headEnd type="none" w="med" len="med"/>
-                      <a:tailEnd type="none" w="med" len="med"/>
-                    </a:lnL>
-                    <a:lnR w="0" cap="flat" cmpd="sng" algn="ctr">
-                      <a:solidFill>
-                        <a:srgbClr val="666666"/>
-                      </a:solidFill>
-                      <a:prstDash val="solid"/>
-                      <a:round/>
-                      <a:headEnd type="none" w="med" len="med"/>
-                      <a:tailEnd type="none" w="med" len="med"/>
-                    </a:lnR>
-                    <a:lnT w="0" cap="flat" cmpd="sng" algn="ctr">
-                      <a:solidFill>
-                        <a:srgbClr val="666666"/>
-                      </a:solidFill>
-                      <a:prstDash val="solid"/>
-                      <a:round/>
-                      <a:headEnd type="none" w="med" len="med"/>
-                      <a:tailEnd type="none" w="med" len="med"/>
-                    </a:lnT>
-                    <a:lnB w="7620" cap="flat" cmpd="sng" algn="ctr">
-                      <a:solidFill>
-                        <a:srgbClr val="E2E4EA"/>
-                      </a:solidFill>
-                      <a:prstDash val="solid"/>
-                      <a:round/>
-                      <a:headEnd type="none" w="med" len="med"/>
-                      <a:tailEnd type="none" w="med" len="med"/>
-                    </a:lnB>
-                    <a:solidFill>
-                      <a:srgbClr val="FFFFFF"/>
-                    </a:solidFill>
-                  </a:tcPr>
-                </a:tc>
-                <a:tc>
-                  <a:txBody>
-                    <a:bodyPr/>
-                    <a:lstStyle/>
-                    <a:p>
-                      <a:pPr algn="r" indent="0" marL="0">
-                        <a:buNone/>
-                      </a:pPr>
-                      <a:r>
-                        <a:rPr lang="en-US" sz="1050" dirty="0">
-                          <a:solidFill>
-                            <a:srgbClr val="3B4660"/>
-                          </a:solidFill>
-                          <a:latin typeface="Calibri" pitchFamily="34" charset="0"/>
-                          <a:ea typeface="Calibri" pitchFamily="34" charset="-122"/>
-                          <a:cs typeface="Calibri" pitchFamily="34" charset="-120"/>
-                        </a:rPr>
-                        <a:t>0.60%</a:t>
-                      </a:r>
-                      <a:endParaRPr lang="en-US" sz="1050" dirty="0">
-                        <a:latin typeface="Calibri" charset="0"/>
-                        <a:ea typeface="Calibri" charset="0"/>
-                        <a:cs typeface="Calibri" charset="0"/>
-                      </a:endParaRPr>
-                    </a:p>
-                  </a:txBody>
-                  <a:tcPr marL="0" marR="76200" marT="63500" marB="63500" anchor="ctr">
-                    <a:lnL w="0" cap="flat" cmpd="sng" algn="ctr">
-                      <a:solidFill>
-                        <a:srgbClr val="666666"/>
-                      </a:solidFill>
-                      <a:prstDash val="solid"/>
-                      <a:round/>
-                      <a:headEnd type="none" w="med" len="med"/>
-                      <a:tailEnd type="none" w="med" len="med"/>
-                    </a:lnL>
-                    <a:lnR w="0" cap="flat" cmpd="sng" algn="ctr">
-                      <a:solidFill>
-                        <a:srgbClr val="666666"/>
-                      </a:solidFill>
-                      <a:prstDash val="solid"/>
-                      <a:round/>
-                      <a:headEnd type="none" w="med" len="med"/>
-                      <a:tailEnd type="none" w="med" len="med"/>
-                    </a:lnR>
-                    <a:lnT w="0" cap="flat" cmpd="sng" algn="ctr">
-                      <a:solidFill>
-                        <a:srgbClr val="666666"/>
-                      </a:solidFill>
-                      <a:prstDash val="solid"/>
-                      <a:round/>
-                      <a:headEnd type="none" w="med" len="med"/>
-                      <a:tailEnd type="none" w="med" len="med"/>
-                    </a:lnT>
-                    <a:lnB w="7620" cap="flat" cmpd="sng" algn="ctr">
-                      <a:solidFill>
-                        <a:srgbClr val="E2E4EA"/>
-                      </a:solidFill>
-                      <a:prstDash val="solid"/>
-                      <a:round/>
-                      <a:headEnd type="none" w="med" len="med"/>
-                      <a:tailEnd type="none" w="med" len="med"/>
-                    </a:lnB>
-                    <a:solidFill>
-                      <a:srgbClr val="FFFFFF"/>
-                    </a:solidFill>
-                  </a:tcPr>
-                </a:tc>
-              </a:tr>
-              <a:tr h="256032">
-                <a:tc>
-                  <a:txBody>
-                    <a:bodyPr/>
-                    <a:lstStyle/>
-                    <a:p>
-                      <a:pPr algn="l" indent="0" marL="0">
-                        <a:buNone/>
-                      </a:pPr>
-                      <a:r>
-                        <a:rPr lang="en-US" sz="1050" dirty="0">
-                          <a:solidFill>
-                            <a:srgbClr val="3B4660"/>
-                          </a:solidFill>
-                          <a:latin typeface="Calibri" pitchFamily="34" charset="0"/>
-                          <a:ea typeface="Calibri" pitchFamily="34" charset="-122"/>
-                          <a:cs typeface="Calibri" pitchFamily="34" charset="-120"/>
-                        </a:rPr>
                         <a:t>Above ₹1 crore and up to ₹2 crore</a:t>
                       </a:r>
                       <a:endParaRPr lang="en-US" sz="1050" dirty="0">
@@ -7985,12 +7996,12 @@
         </p:nvSpPr>
         <p:spPr>
           <a:xfrm>
-            <a:off x="566928" y="5662517"/>
-            <a:ext cx="11057839" cy="731520"/>
+            <a:off x="566928" y="4344416"/>
+            <a:ext cx="11057839" cy="1512428"/>
           </a:xfrm>
           <a:prstGeom prst="roundRect">
             <a:avLst>
-              <a:gd name="adj" fmla="val 6250"/>
+              <a:gd name="adj" fmla="val 3023"/>
             </a:avLst>
           </a:prstGeom>
           <a:solidFill>
@@ -8012,8 +8023,8 @@
         </p:nvSpPr>
         <p:spPr>
           <a:xfrm>
-            <a:off x="804672" y="5808821"/>
-            <a:ext cx="2743200" cy="201168"/>
+            <a:off x="804672" y="4454144"/>
+            <a:ext cx="2743200" cy="182880"/>
           </a:xfrm>
           <a:prstGeom prst="rect">
             <a:avLst/>
@@ -8051,8 +8062,8 @@
         </p:nvSpPr>
         <p:spPr>
           <a:xfrm>
-            <a:off x="804672" y="6009989"/>
-            <a:ext cx="10582351" cy="232220"/>
+            <a:off x="804672" y="4637024"/>
+            <a:ext cx="10582351" cy="288595"/>
           </a:xfrm>
           <a:prstGeom prst="rect">
             <a:avLst/>
@@ -8066,12 +8077,12 @@
           <a:p>
             <a:pPr indent="0" marL="0">
               <a:lnSpc>
-                <a:spcPts val="1725"/>
+                <a:spcPts val="2185"/>
               </a:lnSpc>
               <a:buNone/>
             </a:pPr>
             <a:r>
-              <a:rPr lang="en-US" sz="1500" b="1" dirty="0">
+              <a:rPr lang="en-US" sz="1900" b="1" dirty="0">
                 <a:solidFill>
                   <a:srgbClr val="0A1426"/>
                 </a:solidFill>
@@ -8081,7 +8092,7 @@
               </a:rPr>
               <a:t>The thresholds moved in VAPPL's favour on 1 April 2025</a:t>
             </a:r>
-            <a:endParaRPr lang="en-US" sz="1500" dirty="0"/>
+            <a:endParaRPr lang="en-US" sz="1900" dirty="0"/>
           </a:p>
         </p:txBody>
       </p:sp>
@@ -8093,8 +8104,8 @@
         </p:nvSpPr>
         <p:spPr>
           <a:xfrm>
-            <a:off x="804672" y="6315361"/>
-            <a:ext cx="10582351" cy="182880"/>
+            <a:off x="804672" y="4980483"/>
+            <a:ext cx="10582351" cy="803209"/>
           </a:xfrm>
           <a:prstGeom prst="rect">
             <a:avLst/>
@@ -8108,12 +8119,12 @@
           <a:p>
             <a:pPr indent="0" marL="0">
               <a:lnSpc>
-                <a:spcPts val="1207"/>
+                <a:spcPts val="1704"/>
               </a:lnSpc>
               <a:buNone/>
             </a:pPr>
             <a:r>
-              <a:rPr lang="en-US" sz="850" dirty="0">
+              <a:rPr lang="en-US" sz="1200" dirty="0">
                 <a:solidFill>
                   <a:srgbClr val="3B4660"/>
                 </a:solidFill>
@@ -8121,9 +8132,9 @@
                 <a:ea typeface="Calibri" pitchFamily="34" charset="-122"/>
                 <a:cs typeface="Calibri" pitchFamily="34" charset="-120"/>
               </a:rPr>
-              <a:t>Small Enterprise limits rose from ₹10 Cr to ₹25 Cr of investment and ₹50 Cr to ₹100 Cr of turnover, and the CGTMSE guarantee ceiling doubled from ₹5 Cr to ₹10 Cr per borrower. Both landed after the ₹10 crore equity round was designed. A guaranteed, collateral-free ₹10 crore facility is available today that was not available when the round was structured — which is the reason this pack exists. A facility sanctioned while the company qualifies keeps its cover for its full tenor.</a:t>
+              <a:t>Small Enterprise limits rose to ₹25 Cr of investment and ₹100 Cr of turnover, and the CGTMSE ceiling doubled to ₹10 Cr per borrower. Both landed after the ₹10 crore equity round was designed — which is the reason this pack exists. A facility sanctioned while the company qualifies keeps its cover for its full tenor.</a:t>
             </a:r>
-            <a:endParaRPr lang="en-US" sz="850" dirty="0"/>
+            <a:endParaRPr lang="en-US" sz="1200" dirty="0"/>
           </a:p>
         </p:txBody>
       </p:sp>
@@ -8304,8 +8315,8 @@
         </p:nvSpPr>
         <p:spPr>
           <a:xfrm>
-            <a:off x="566928" y="1005840"/>
-            <a:ext cx="11057839" cy="512064"/>
+            <a:off x="566928" y="950976"/>
+            <a:ext cx="11057839" cy="462280"/>
           </a:xfrm>
           <a:prstGeom prst="rect">
             <a:avLst/>
@@ -8319,12 +8330,12 @@
           <a:p>
             <a:pPr indent="0" marL="0">
               <a:lnSpc>
-                <a:spcPts val="1900"/>
+                <a:spcPts val="1750"/>
               </a:lnSpc>
               <a:buNone/>
             </a:pPr>
             <a:r>
-              <a:rPr lang="en-US" sz="1350" dirty="0">
+              <a:rPr lang="en-US" sz="1250" dirty="0">
                 <a:solidFill>
                   <a:srgbClr val="3B4660"/>
                 </a:solidFill>
@@ -8334,7 +8345,7 @@
               </a:rPr>
               <a:t>Before raising anything there is a free move. Roughly ₹4 crore of VAPPL's ₹7.85 crore of borrowings is money the promoters already put in. Converting it costs no cash and transforms the balance sheet a lender is asked to lend against.</a:t>
             </a:r>
-            <a:endParaRPr lang="en-US" sz="1350" dirty="0"/>
+            <a:endParaRPr lang="en-US" sz="1250" dirty="0"/>
           </a:p>
         </p:txBody>
       </p:sp>
@@ -8345,8 +8356,8 @@
           <p:nvPr/>
         </p:nvGraphicFramePr>
         <p:xfrm>
-          <a:off x="566928" y="1627632"/>
-          <a:ext cx="11057839" cy="2286000"/>
+          <a:off x="566928" y="1541272"/>
+          <a:ext cx="11057839" cy="1965960"/>
         </p:xfrm>
         <a:graphic xmlns:a="http://schemas.openxmlformats.org/drawingml/2006/main">
           <a:graphicData uri="http://schemas.openxmlformats.org/drawingml/2006/chart">
@@ -8369,7 +8380,7 @@
           </p:nvPr>
         </p:nvGraphicFramePr>
         <p:xfrm>
-          <a:off x="566928" y="4114800"/>
+          <a:off x="566928" y="3708400"/>
           <a:ext cx="11057839" cy="914400"/>
         </p:xfrm>
         <a:graphic>
@@ -9764,12 +9775,12 @@
         </p:nvSpPr>
         <p:spPr>
           <a:xfrm>
-            <a:off x="566928" y="5833872"/>
-            <a:ext cx="11057839" cy="731520"/>
+            <a:off x="566928" y="5427472"/>
+            <a:ext cx="11057839" cy="930087"/>
           </a:xfrm>
           <a:prstGeom prst="roundRect">
             <a:avLst>
-              <a:gd name="adj" fmla="val 6250"/>
+              <a:gd name="adj" fmla="val 4916"/>
             </a:avLst>
           </a:prstGeom>
           <a:solidFill>
@@ -9791,8 +9802,8 @@
         </p:nvSpPr>
         <p:spPr>
           <a:xfrm>
-            <a:off x="804672" y="5980176"/>
-            <a:ext cx="2743200" cy="201168"/>
+            <a:off x="804672" y="5537200"/>
+            <a:ext cx="2743200" cy="182880"/>
           </a:xfrm>
           <a:prstGeom prst="rect">
             <a:avLst/>
@@ -9830,8 +9841,8 @@
         </p:nvSpPr>
         <p:spPr>
           <a:xfrm>
-            <a:off x="804672" y="6181344"/>
-            <a:ext cx="10582351" cy="232220"/>
+            <a:off x="804672" y="5720080"/>
+            <a:ext cx="10582351" cy="212649"/>
           </a:xfrm>
           <a:prstGeom prst="rect">
             <a:avLst/>
@@ -9845,12 +9856,12 @@
           <a:p>
             <a:pPr indent="0" marL="0">
               <a:lnSpc>
-                <a:spcPts val="1725"/>
+                <a:spcPts val="1610"/>
               </a:lnSpc>
               <a:buNone/>
             </a:pPr>
             <a:r>
-              <a:rPr lang="en-US" sz="1500" b="1" dirty="0">
+              <a:rPr lang="en-US" sz="1400" b="1" dirty="0">
                 <a:solidFill>
                   <a:srgbClr val="0A1426"/>
                 </a:solidFill>
@@ -9860,7 +9871,7 @@
               </a:rPr>
               <a:t>Converting only the ₹2.60 crore is not enough</a:t>
             </a:r>
-            <a:endParaRPr lang="en-US" sz="1500" dirty="0"/>
+            <a:endParaRPr lang="en-US" sz="1400" dirty="0"/>
           </a:p>
         </p:txBody>
       </p:sp>
@@ -9872,8 +9883,8 @@
         </p:nvSpPr>
         <p:spPr>
           <a:xfrm>
-            <a:off x="804672" y="6486716"/>
-            <a:ext cx="10582351" cy="182880"/>
+            <a:off x="804672" y="5987593"/>
+            <a:ext cx="10582351" cy="296814"/>
           </a:xfrm>
           <a:prstGeom prst="rect">
             <a:avLst/>
@@ -9887,12 +9898,12 @@
           <a:p>
             <a:pPr indent="0" marL="0">
               <a:lnSpc>
-                <a:spcPts val="1207"/>
+                <a:spcPts val="1278"/>
               </a:lnSpc>
               <a:buNone/>
             </a:pPr>
             <a:r>
-              <a:rPr lang="en-US" sz="850" dirty="0">
+              <a:rPr lang="en-US" sz="900" dirty="0">
                 <a:solidFill>
                   <a:srgbClr val="3B4660"/>
                 </a:solidFill>
@@ -9900,9 +9911,9 @@
                 <a:ea typeface="Calibri" pitchFamily="34" charset="-122"/>
                 <a:cs typeface="Calibri" pitchFamily="34" charset="-120"/>
               </a:rPr>
-              <a:t>With ₹2.60 Cr converted, gearing after a full drawdown lands at 2.36× — outside a 2.0× covenant — and the largest facility that stays inside it is ₹8.11 Cr. Converting all ₹4.09 Cr takes post-drawdown gearing to 1.61× and lifts capacity to ₹12.58 Cr. Without any conversion the company supports ₹0.31 Cr — which is to say, it cannot borrow at all.</a:t>
+              <a:t>Converting ₹2.60 Cr caps the facility at ₹8.11 Cr. Converting all ₹4.09 Cr lifts it to ₹12.58 Cr. Converting nothing supports ₹0.31 Cr — the company cannot borrow at all.</a:t>
             </a:r>
-            <a:endParaRPr lang="en-US" sz="850" dirty="0"/>
+            <a:endParaRPr lang="en-US" sz="900" dirty="0"/>
           </a:p>
         </p:txBody>
       </p:sp>
@@ -10083,8 +10094,8 @@
         </p:nvSpPr>
         <p:spPr>
           <a:xfrm>
-            <a:off x="566928" y="1005840"/>
-            <a:ext cx="11057839" cy="512064"/>
+            <a:off x="566928" y="950976"/>
+            <a:ext cx="11057839" cy="462280"/>
           </a:xfrm>
           <a:prstGeom prst="rect">
             <a:avLst/>
@@ -10098,12 +10109,12 @@
           <a:p>
             <a:pPr indent="0" marL="0">
               <a:lnSpc>
-                <a:spcPts val="1900"/>
+                <a:spcPts val="1750"/>
               </a:lnSpc>
               <a:buNone/>
             </a:pPr>
             <a:r>
-              <a:rPr lang="en-US" sz="1350" dirty="0">
+              <a:rPr lang="en-US" sz="1250" dirty="0">
                 <a:solidFill>
                   <a:srgbClr val="3B4660"/>
                 </a:solidFill>
@@ -10113,7 +10124,7 @@
               </a:rPr>
               <a:t>The existing four parks plus all three new projects, phased on the award and opening dates assumed in each project deck. Existing-portfolio figures are the midpoints already published in the company financial model.</a:t>
             </a:r>
-            <a:endParaRPr lang="en-US" sz="1350" dirty="0"/>
+            <a:endParaRPr lang="en-US" sz="1250" dirty="0"/>
           </a:p>
         </p:txBody>
       </p:sp>
@@ -10124,8 +10135,8 @@
           <p:nvPr/>
         </p:nvGraphicFramePr>
         <p:xfrm>
-          <a:off x="566928" y="1627632"/>
-          <a:ext cx="11057839" cy="2788920"/>
+          <a:off x="566928" y="1541272"/>
+          <a:ext cx="11057839" cy="2468880"/>
         </p:xfrm>
         <a:graphic xmlns:a="http://schemas.openxmlformats.org/drawingml/2006/main">
           <a:graphicData uri="http://schemas.openxmlformats.org/drawingml/2006/chart">
@@ -10141,12 +10152,12 @@
         </p:nvSpPr>
         <p:spPr>
           <a:xfrm>
-            <a:off x="566928" y="4645152"/>
-            <a:ext cx="3539642" cy="1188720"/>
+            <a:off x="566928" y="4238752"/>
+            <a:ext cx="3539642" cy="1115568"/>
           </a:xfrm>
           <a:prstGeom prst="roundRect">
             <a:avLst>
-              <a:gd name="adj" fmla="val 4615"/>
+              <a:gd name="adj" fmla="val 4918"/>
             </a:avLst>
           </a:prstGeom>
           <a:solidFill>
@@ -10168,8 +10179,8 @@
         </p:nvSpPr>
         <p:spPr>
           <a:xfrm>
-            <a:off x="749808" y="4782312"/>
-            <a:ext cx="3173882" cy="219456"/>
+            <a:off x="749808" y="4357624"/>
+            <a:ext cx="3173882" cy="237744"/>
           </a:xfrm>
           <a:prstGeom prst="rect">
             <a:avLst/>
@@ -10178,14 +10189,14 @@
           <a:ln/>
         </p:spPr>
         <p:txBody>
-          <a:bodyPr wrap="square" lIns="0" tIns="0" rIns="0" bIns="0" rtlCol="0" anchor="ctr"/>
+          <a:bodyPr wrap="square" lIns="0" tIns="0" rIns="0" bIns="0" rtlCol="0" anchor="t"/>
           <a:lstStyle/>
           <a:p>
             <a:pPr indent="0" marL="0">
               <a:buNone/>
             </a:pPr>
             <a:r>
-              <a:rPr lang="en-US" sz="900" b="1" spc="120" kern="0" dirty="0">
+              <a:rPr lang="en-US" sz="850" b="1" spc="100" kern="0" dirty="0">
                 <a:solidFill>
                   <a:srgbClr val="6E7689"/>
                 </a:solidFill>
@@ -10195,7 +10206,7 @@
               </a:rPr>
               <a:t>FY30-31 REVENUE</a:t>
             </a:r>
-            <a:endParaRPr lang="en-US" sz="900" dirty="0"/>
+            <a:endParaRPr lang="en-US" sz="850" dirty="0"/>
           </a:p>
         </p:txBody>
       </p:sp>
@@ -10207,7 +10218,7 @@
         </p:nvSpPr>
         <p:spPr>
           <a:xfrm>
-            <a:off x="749808" y="5010912"/>
+            <a:off x="749808" y="4604512"/>
             <a:ext cx="3173882" cy="457200"/>
           </a:xfrm>
           <a:prstGeom prst="rect">
@@ -10217,7 +10228,9 @@
           <a:ln/>
         </p:spPr>
         <p:txBody>
-          <a:bodyPr wrap="square" lIns="0" tIns="0" rIns="0" bIns="0" rtlCol="0" anchor="t"/>
+          <a:bodyPr wrap="square" lIns="0" tIns="0" rIns="0" bIns="0" rtlCol="0" anchor="t">
+            <a:normAutofit/>
+          </a:bodyPr>
           <a:lstStyle/>
           <a:p>
             <a:pPr indent="0" marL="0">
@@ -10246,8 +10259,8 @@
         </p:nvSpPr>
         <p:spPr>
           <a:xfrm>
-            <a:off x="749808" y="5486400"/>
-            <a:ext cx="3173882" cy="274320"/>
+            <a:off x="749808" y="5080000"/>
+            <a:ext cx="3173882" cy="201168"/>
           </a:xfrm>
           <a:prstGeom prst="rect">
             <a:avLst/>
@@ -10288,12 +10301,12 @@
         </p:nvSpPr>
         <p:spPr>
           <a:xfrm>
-            <a:off x="4326026" y="4645152"/>
-            <a:ext cx="3539642" cy="1188720"/>
+            <a:off x="4326026" y="4238752"/>
+            <a:ext cx="3539642" cy="1115568"/>
           </a:xfrm>
           <a:prstGeom prst="roundRect">
             <a:avLst>
-              <a:gd name="adj" fmla="val 4615"/>
+              <a:gd name="adj" fmla="val 4918"/>
             </a:avLst>
           </a:prstGeom>
           <a:solidFill>
@@ -10315,8 +10328,8 @@
         </p:nvSpPr>
         <p:spPr>
           <a:xfrm>
-            <a:off x="4508906" y="4782312"/>
-            <a:ext cx="3173882" cy="219456"/>
+            <a:off x="4508906" y="4357624"/>
+            <a:ext cx="3173882" cy="237744"/>
           </a:xfrm>
           <a:prstGeom prst="rect">
             <a:avLst/>
@@ -10325,14 +10338,14 @@
           <a:ln/>
         </p:spPr>
         <p:txBody>
-          <a:bodyPr wrap="square" lIns="0" tIns="0" rIns="0" bIns="0" rtlCol="0" anchor="ctr"/>
+          <a:bodyPr wrap="square" lIns="0" tIns="0" rIns="0" bIns="0" rtlCol="0" anchor="t"/>
           <a:lstStyle/>
           <a:p>
             <a:pPr indent="0" marL="0">
               <a:buNone/>
             </a:pPr>
             <a:r>
-              <a:rPr lang="en-US" sz="900" b="1" spc="120" kern="0" dirty="0">
+              <a:rPr lang="en-US" sz="850" b="1" spc="100" kern="0" dirty="0">
                 <a:solidFill>
                   <a:srgbClr val="6E7689"/>
                 </a:solidFill>
@@ -10342,7 +10355,7 @@
               </a:rPr>
               <a:t>FY30-31 EBITDA</a:t>
             </a:r>
-            <a:endParaRPr lang="en-US" sz="900" dirty="0"/>
+            <a:endParaRPr lang="en-US" sz="850" dirty="0"/>
           </a:p>
         </p:txBody>
       </p:sp>
@@ -10354,7 +10367,7 @@
         </p:nvSpPr>
         <p:spPr>
           <a:xfrm>
-            <a:off x="4508906" y="5010912"/>
+            <a:off x="4508906" y="4604512"/>
             <a:ext cx="3173882" cy="457200"/>
           </a:xfrm>
           <a:prstGeom prst="rect">
@@ -10364,7 +10377,9 @@
           <a:ln/>
         </p:spPr>
         <p:txBody>
-          <a:bodyPr wrap="square" lIns="0" tIns="0" rIns="0" bIns="0" rtlCol="0" anchor="t"/>
+          <a:bodyPr wrap="square" lIns="0" tIns="0" rIns="0" bIns="0" rtlCol="0" anchor="t">
+            <a:normAutofit/>
+          </a:bodyPr>
           <a:lstStyle/>
           <a:p>
             <a:pPr indent="0" marL="0">
@@ -10393,8 +10408,8 @@
         </p:nvSpPr>
         <p:spPr>
           <a:xfrm>
-            <a:off x="4508906" y="5486400"/>
-            <a:ext cx="3173882" cy="274320"/>
+            <a:off x="4508906" y="5080000"/>
+            <a:ext cx="3173882" cy="201168"/>
           </a:xfrm>
           <a:prstGeom prst="rect">
             <a:avLst/>
@@ -10435,12 +10450,12 @@
         </p:nvSpPr>
         <p:spPr>
           <a:xfrm>
-            <a:off x="8085125" y="4645152"/>
-            <a:ext cx="3539642" cy="1188720"/>
+            <a:off x="8085125" y="4238752"/>
+            <a:ext cx="3539642" cy="1115568"/>
           </a:xfrm>
           <a:prstGeom prst="roundRect">
             <a:avLst>
-              <a:gd name="adj" fmla="val 4615"/>
+              <a:gd name="adj" fmla="val 4918"/>
             </a:avLst>
           </a:prstGeom>
           <a:solidFill>
@@ -10462,8 +10477,8 @@
         </p:nvSpPr>
         <p:spPr>
           <a:xfrm>
-            <a:off x="8268005" y="4782312"/>
-            <a:ext cx="3173882" cy="219456"/>
+            <a:off x="8268005" y="4357624"/>
+            <a:ext cx="3173882" cy="237744"/>
           </a:xfrm>
           <a:prstGeom prst="rect">
             <a:avLst/>
@@ -10472,14 +10487,14 @@
           <a:ln/>
         </p:spPr>
         <p:txBody>
-          <a:bodyPr wrap="square" lIns="0" tIns="0" rIns="0" bIns="0" rtlCol="0" anchor="ctr"/>
+          <a:bodyPr wrap="square" lIns="0" tIns="0" rIns="0" bIns="0" rtlCol="0" anchor="t"/>
           <a:lstStyle/>
           <a:p>
             <a:pPr indent="0" marL="0">
               <a:buNone/>
             </a:pPr>
             <a:r>
-              <a:rPr lang="en-US" sz="900" b="1" spc="120" kern="0" dirty="0">
+              <a:rPr lang="en-US" sz="850" b="1" spc="100" kern="0" dirty="0">
                 <a:solidFill>
                   <a:srgbClr val="6E7689"/>
                 </a:solidFill>
@@ -10489,7 +10504,7 @@
               </a:rPr>
               <a:t>NEW PROJECTS' SHARE</a:t>
             </a:r>
-            <a:endParaRPr lang="en-US" sz="900" dirty="0"/>
+            <a:endParaRPr lang="en-US" sz="850" dirty="0"/>
           </a:p>
         </p:txBody>
       </p:sp>
@@ -10501,7 +10516,7 @@
         </p:nvSpPr>
         <p:spPr>
           <a:xfrm>
-            <a:off x="8268005" y="5010912"/>
+            <a:off x="8268005" y="4604512"/>
             <a:ext cx="3173882" cy="457200"/>
           </a:xfrm>
           <a:prstGeom prst="rect">
@@ -10511,7 +10526,9 @@
           <a:ln/>
         </p:spPr>
         <p:txBody>
-          <a:bodyPr wrap="square" lIns="0" tIns="0" rIns="0" bIns="0" rtlCol="0" anchor="t"/>
+          <a:bodyPr wrap="square" lIns="0" tIns="0" rIns="0" bIns="0" rtlCol="0" anchor="t">
+            <a:normAutofit/>
+          </a:bodyPr>
           <a:lstStyle/>
           <a:p>
             <a:pPr indent="0" marL="0">
@@ -10540,8 +10557,8 @@
         </p:nvSpPr>
         <p:spPr>
           <a:xfrm>
-            <a:off x="8268005" y="5486400"/>
-            <a:ext cx="3173882" cy="274320"/>
+            <a:off x="8268005" y="5080000"/>
+            <a:ext cx="3173882" cy="201168"/>
           </a:xfrm>
           <a:prstGeom prst="rect">
             <a:avLst/>
@@ -10751,8 +10768,8 @@
         </p:nvSpPr>
         <p:spPr>
           <a:xfrm>
-            <a:off x="566928" y="1005840"/>
-            <a:ext cx="11057839" cy="512064"/>
+            <a:off x="566928" y="950976"/>
+            <a:ext cx="11057839" cy="462280"/>
           </a:xfrm>
           <a:prstGeom prst="rect">
             <a:avLst/>
@@ -10766,12 +10783,12 @@
           <a:p>
             <a:pPr indent="0" marL="0">
               <a:lnSpc>
-                <a:spcPts val="1900"/>
+                <a:spcPts val="1750"/>
               </a:lnSpc>
               <a:buNone/>
             </a:pPr>
             <a:r>
-              <a:rPr lang="en-US" sz="1350" dirty="0">
+              <a:rPr lang="en-US" sz="1250" dirty="0">
                 <a:solidFill>
                   <a:srgbClr val="3B4660"/>
                 </a:solidFill>
@@ -10781,7 +10798,7 @@
               </a:rPr>
               <a:t>The existing round is ₹10 crore at ₹90 crore pre-money. Funding all three new projects with equity would take it to roughly ₹16 crore. Here is what that returns to the person writing the cheque.</a:t>
             </a:r>
-            <a:endParaRPr lang="en-US" sz="1350" dirty="0"/>
+            <a:endParaRPr lang="en-US" sz="1250" dirty="0"/>
           </a:p>
         </p:txBody>
       </p:sp>
@@ -10800,7 +10817,7 @@
           </p:nvPr>
         </p:nvGraphicFramePr>
         <p:xfrm>
-          <a:off x="566928" y="1627632"/>
+          <a:off x="566928" y="1541272"/>
           <a:ext cx="11057839" cy="914400"/>
         </p:xfrm>
         <a:graphic>
@@ -10811,7 +10828,7 @@
                 <a:gridCol w="8595360"/>
                 <a:gridCol w="2462479"/>
               </a:tblGrid>
-              <a:tr h="292608">
+              <a:tr h="274320">
                 <a:tc>
                   <a:txBody>
                     <a:bodyPr/>
@@ -10949,7 +10966,7 @@
                   </a:tcPr>
                 </a:tc>
               </a:tr>
-              <a:tr h="292608">
+              <a:tr h="274320">
                 <a:tc>
                   <a:txBody>
                     <a:bodyPr/>
@@ -10967,134 +10984,7 @@
                           <a:ea typeface="Calibri" pitchFamily="34" charset="-122"/>
                           <a:cs typeface="Calibri" pitchFamily="34" charset="-120"/>
                         </a:rPr>
-                        <a:t>Exit year — FY30-31, five years from a September 2026 close</a:t>
-                      </a:r>
-                      <a:endParaRPr lang="en-US" sz="1100" dirty="0">
-                        <a:latin typeface="Calibri" charset="0"/>
-                        <a:ea typeface="Calibri" charset="0"/>
-                        <a:cs typeface="Calibri" charset="0"/>
-                      </a:endParaRPr>
-                    </a:p>
-                  </a:txBody>
-                  <a:tcPr marL="0" marR="76200" marT="63500" marB="63500" anchor="ctr">
-                    <a:lnL w="0" cap="flat" cmpd="sng" algn="ctr">
-                      <a:solidFill>
-                        <a:srgbClr val="666666"/>
-                      </a:solidFill>
-                      <a:prstDash val="solid"/>
-                      <a:round/>
-                      <a:headEnd type="none" w="med" len="med"/>
-                      <a:tailEnd type="none" w="med" len="med"/>
-                    </a:lnL>
-                    <a:lnR w="0" cap="flat" cmpd="sng" algn="ctr">
-                      <a:solidFill>
-                        <a:srgbClr val="666666"/>
-                      </a:solidFill>
-                      <a:prstDash val="solid"/>
-                      <a:round/>
-                      <a:headEnd type="none" w="med" len="med"/>
-                      <a:tailEnd type="none" w="med" len="med"/>
-                    </a:lnR>
-                    <a:lnT w="0" cap="flat" cmpd="sng" algn="ctr">
-                      <a:solidFill>
-                        <a:srgbClr val="666666"/>
-                      </a:solidFill>
-                      <a:prstDash val="solid"/>
-                      <a:round/>
-                      <a:headEnd type="none" w="med" len="med"/>
-                      <a:tailEnd type="none" w="med" len="med"/>
-                    </a:lnT>
-                    <a:lnB w="7620" cap="flat" cmpd="sng" algn="ctr">
-                      <a:solidFill>
-                        <a:srgbClr val="E2E4EA"/>
-                      </a:solidFill>
-                      <a:prstDash val="solid"/>
-                      <a:round/>
-                      <a:headEnd type="none" w="med" len="med"/>
-                      <a:tailEnd type="none" w="med" len="med"/>
-                    </a:lnB>
-                    <a:solidFill>
-                      <a:srgbClr val="FFFFFF"/>
-                    </a:solidFill>
-                  </a:tcPr>
-                </a:tc>
-                <a:tc>
-                  <a:txBody>
-                    <a:bodyPr/>
-                    <a:lstStyle/>
-                    <a:p>
-                      <a:pPr algn="r" indent="0" marL="0">
-                        <a:buNone/>
-                      </a:pPr>
-                      <a:endParaRPr lang="en-US" sz="1100" dirty="0">
-                        <a:latin typeface="Calibri" charset="0"/>
-                        <a:ea typeface="Calibri" charset="0"/>
-                        <a:cs typeface="Calibri" charset="0"/>
-                      </a:endParaRPr>
-                    </a:p>
-                  </a:txBody>
-                  <a:tcPr marL="0" marR="76200" marT="63500" marB="63500" anchor="ctr">
-                    <a:lnL w="0" cap="flat" cmpd="sng" algn="ctr">
-                      <a:solidFill>
-                        <a:srgbClr val="666666"/>
-                      </a:solidFill>
-                      <a:prstDash val="solid"/>
-                      <a:round/>
-                      <a:headEnd type="none" w="med" len="med"/>
-                      <a:tailEnd type="none" w="med" len="med"/>
-                    </a:lnL>
-                    <a:lnR w="0" cap="flat" cmpd="sng" algn="ctr">
-                      <a:solidFill>
-                        <a:srgbClr val="666666"/>
-                      </a:solidFill>
-                      <a:prstDash val="solid"/>
-                      <a:round/>
-                      <a:headEnd type="none" w="med" len="med"/>
-                      <a:tailEnd type="none" w="med" len="med"/>
-                    </a:lnR>
-                    <a:lnT w="0" cap="flat" cmpd="sng" algn="ctr">
-                      <a:solidFill>
-                        <a:srgbClr val="666666"/>
-                      </a:solidFill>
-                      <a:prstDash val="solid"/>
-                      <a:round/>
-                      <a:headEnd type="none" w="med" len="med"/>
-                      <a:tailEnd type="none" w="med" len="med"/>
-                    </a:lnT>
-                    <a:lnB w="7620" cap="flat" cmpd="sng" algn="ctr">
-                      <a:solidFill>
-                        <a:srgbClr val="E2E4EA"/>
-                      </a:solidFill>
-                      <a:prstDash val="solid"/>
-                      <a:round/>
-                      <a:headEnd type="none" w="med" len="med"/>
-                      <a:tailEnd type="none" w="med" len="med"/>
-                    </a:lnB>
-                    <a:solidFill>
-                      <a:srgbClr val="FFFFFF"/>
-                    </a:solidFill>
-                  </a:tcPr>
-                </a:tc>
-              </a:tr>
-              <a:tr h="292608">
-                <a:tc>
-                  <a:txBody>
-                    <a:bodyPr/>
-                    <a:lstStyle/>
-                    <a:p>
-                      <a:pPr algn="l" indent="0" marL="0">
-                        <a:buNone/>
-                      </a:pPr>
-                      <a:r>
-                        <a:rPr lang="en-US" sz="1100" dirty="0">
-                          <a:solidFill>
-                            <a:srgbClr val="3B4660"/>
-                          </a:solidFill>
-                          <a:latin typeface="Calibri" pitchFamily="34" charset="0"/>
-                          <a:ea typeface="Calibri" pitchFamily="34" charset="-122"/>
-                          <a:cs typeface="Calibri" pitchFamily="34" charset="-120"/>
-                        </a:rPr>
-                        <a:t>Revenue at exit</a:t>
+                        <a:t>Revenue at exit — FY30-31, five years from a September 2026 close</a:t>
                       </a:r>
                       <a:endParaRPr lang="en-US" sz="1100" dirty="0">
                         <a:latin typeface="Calibri" charset="0"/>
@@ -11214,7 +11104,7 @@
                   </a:tcPr>
                 </a:tc>
               </a:tr>
-              <a:tr h="292608">
+              <a:tr h="274320">
                 <a:tc>
                   <a:txBody>
                     <a:bodyPr/>
@@ -11232,7 +11122,7 @@
                           <a:ea typeface="Calibri" pitchFamily="34" charset="-122"/>
                           <a:cs typeface="Calibri" pitchFamily="34" charset="-120"/>
                         </a:rPr>
-                        <a:t>Enterprise value at 3.0× revenue — the company model's own peer frame is 3–5×</a:t>
+                        <a:t>Enterprise value at 3.0× revenue (11× EBITDA cross-checks at ₹219 Cr)</a:t>
                       </a:r>
                       <a:endParaRPr lang="en-US" sz="1100" dirty="0">
                         <a:latin typeface="Calibri" charset="0"/>
@@ -11352,145 +11242,7 @@
                   </a:tcPr>
                 </a:tc>
               </a:tr>
-              <a:tr h="292608">
-                <a:tc>
-                  <a:txBody>
-                    <a:bodyPr/>
-                    <a:lstStyle/>
-                    <a:p>
-                      <a:pPr algn="l" indent="0" marL="0">
-                        <a:buNone/>
-                      </a:pPr>
-                      <a:r>
-                        <a:rPr lang="en-US" sz="1100" dirty="0">
-                          <a:solidFill>
-                            <a:srgbClr val="3B4660"/>
-                          </a:solidFill>
-                          <a:latin typeface="Calibri" pitchFamily="34" charset="0"/>
-                          <a:ea typeface="Calibri" pitchFamily="34" charset="-122"/>
-                          <a:cs typeface="Calibri" pitchFamily="34" charset="-120"/>
-                        </a:rPr>
-                        <a:t>Cross-check at 11× EBITDA</a:t>
-                      </a:r>
-                      <a:endParaRPr lang="en-US" sz="1100" dirty="0">
-                        <a:latin typeface="Calibri" charset="0"/>
-                        <a:ea typeface="Calibri" charset="0"/>
-                        <a:cs typeface="Calibri" charset="0"/>
-                      </a:endParaRPr>
-                    </a:p>
-                  </a:txBody>
-                  <a:tcPr marL="0" marR="76200" marT="63500" marB="63500" anchor="ctr">
-                    <a:lnL w="0" cap="flat" cmpd="sng" algn="ctr">
-                      <a:solidFill>
-                        <a:srgbClr val="666666"/>
-                      </a:solidFill>
-                      <a:prstDash val="solid"/>
-                      <a:round/>
-                      <a:headEnd type="none" w="med" len="med"/>
-                      <a:tailEnd type="none" w="med" len="med"/>
-                    </a:lnL>
-                    <a:lnR w="0" cap="flat" cmpd="sng" algn="ctr">
-                      <a:solidFill>
-                        <a:srgbClr val="666666"/>
-                      </a:solidFill>
-                      <a:prstDash val="solid"/>
-                      <a:round/>
-                      <a:headEnd type="none" w="med" len="med"/>
-                      <a:tailEnd type="none" w="med" len="med"/>
-                    </a:lnR>
-                    <a:lnT w="0" cap="flat" cmpd="sng" algn="ctr">
-                      <a:solidFill>
-                        <a:srgbClr val="666666"/>
-                      </a:solidFill>
-                      <a:prstDash val="solid"/>
-                      <a:round/>
-                      <a:headEnd type="none" w="med" len="med"/>
-                      <a:tailEnd type="none" w="med" len="med"/>
-                    </a:lnT>
-                    <a:lnB w="7620" cap="flat" cmpd="sng" algn="ctr">
-                      <a:solidFill>
-                        <a:srgbClr val="E2E4EA"/>
-                      </a:solidFill>
-                      <a:prstDash val="solid"/>
-                      <a:round/>
-                      <a:headEnd type="none" w="med" len="med"/>
-                      <a:tailEnd type="none" w="med" len="med"/>
-                    </a:lnB>
-                    <a:solidFill>
-                      <a:srgbClr val="FFFFFF"/>
-                    </a:solidFill>
-                  </a:tcPr>
-                </a:tc>
-                <a:tc>
-                  <a:txBody>
-                    <a:bodyPr/>
-                    <a:lstStyle/>
-                    <a:p>
-                      <a:pPr algn="r" indent="0" marL="0">
-                        <a:buNone/>
-                      </a:pPr>
-                      <a:r>
-                        <a:rPr lang="en-US" sz="1100" dirty="0">
-                          <a:solidFill>
-                            <a:srgbClr val="3B4660"/>
-                          </a:solidFill>
-                          <a:latin typeface="Calibri" pitchFamily="34" charset="0"/>
-                          <a:ea typeface="Calibri" pitchFamily="34" charset="-122"/>
-                          <a:cs typeface="Calibri" pitchFamily="34" charset="-120"/>
-                        </a:rPr>
-                        <a:t>₹219 Cr</a:t>
-                      </a:r>
-                      <a:endParaRPr lang="en-US" sz="1100" dirty="0">
-                        <a:latin typeface="Calibri" charset="0"/>
-                        <a:ea typeface="Calibri" charset="0"/>
-                        <a:cs typeface="Calibri" charset="0"/>
-                      </a:endParaRPr>
-                    </a:p>
-                  </a:txBody>
-                  <a:tcPr marL="0" marR="76200" marT="63500" marB="63500" anchor="ctr">
-                    <a:lnL w="0" cap="flat" cmpd="sng" algn="ctr">
-                      <a:solidFill>
-                        <a:srgbClr val="666666"/>
-                      </a:solidFill>
-                      <a:prstDash val="solid"/>
-                      <a:round/>
-                      <a:headEnd type="none" w="med" len="med"/>
-                      <a:tailEnd type="none" w="med" len="med"/>
-                    </a:lnL>
-                    <a:lnR w="0" cap="flat" cmpd="sng" algn="ctr">
-                      <a:solidFill>
-                        <a:srgbClr val="666666"/>
-                      </a:solidFill>
-                      <a:prstDash val="solid"/>
-                      <a:round/>
-                      <a:headEnd type="none" w="med" len="med"/>
-                      <a:tailEnd type="none" w="med" len="med"/>
-                    </a:lnR>
-                    <a:lnT w="0" cap="flat" cmpd="sng" algn="ctr">
-                      <a:solidFill>
-                        <a:srgbClr val="666666"/>
-                      </a:solidFill>
-                      <a:prstDash val="solid"/>
-                      <a:round/>
-                      <a:headEnd type="none" w="med" len="med"/>
-                      <a:tailEnd type="none" w="med" len="med"/>
-                    </a:lnT>
-                    <a:lnB w="7620" cap="flat" cmpd="sng" algn="ctr">
-                      <a:solidFill>
-                        <a:srgbClr val="E2E4EA"/>
-                      </a:solidFill>
-                      <a:prstDash val="solid"/>
-                      <a:round/>
-                      <a:headEnd type="none" w="med" len="med"/>
-                      <a:tailEnd type="none" w="med" len="med"/>
-                    </a:lnB>
-                    <a:solidFill>
-                      <a:srgbClr val="FFFFFF"/>
-                    </a:solidFill>
-                  </a:tcPr>
-                </a:tc>
-              </a:tr>
-              <a:tr h="292608">
+              <a:tr h="274320">
                 <a:tc>
                   <a:txBody>
                     <a:bodyPr/>
@@ -11628,7 +11380,7 @@
                   </a:tcPr>
                 </a:tc>
               </a:tr>
-              <a:tr h="292608">
+              <a:tr h="274320">
                 <a:tc>
                   <a:txBody>
                     <a:bodyPr/>
@@ -11766,7 +11518,7 @@
                   </a:tcPr>
                 </a:tc>
               </a:tr>
-              <a:tr h="292608">
+              <a:tr h="274320">
                 <a:tc>
                   <a:txBody>
                     <a:bodyPr/>
@@ -11923,7 +11675,7 @@
           </p:nvPr>
         </p:nvGraphicFramePr>
         <p:xfrm>
-          <a:off x="566928" y="4477830"/>
+          <a:off x="566928" y="3729482"/>
           <a:ext cx="11057839" cy="914400"/>
         </p:xfrm>
         <a:graphic>
@@ -12977,12 +12729,12 @@
         </p:nvSpPr>
         <p:spPr>
           <a:xfrm>
-            <a:off x="566928" y="6187504"/>
-            <a:ext cx="11057839" cy="731520"/>
+            <a:off x="566928" y="5425186"/>
+            <a:ext cx="11057839" cy="930087"/>
           </a:xfrm>
           <a:prstGeom prst="roundRect">
             <a:avLst>
-              <a:gd name="adj" fmla="val 6250"/>
+              <a:gd name="adj" fmla="val 4916"/>
             </a:avLst>
           </a:prstGeom>
           <a:solidFill>
@@ -13004,8 +12756,8 @@
         </p:nvSpPr>
         <p:spPr>
           <a:xfrm>
-            <a:off x="804672" y="6333808"/>
-            <a:ext cx="2743200" cy="201168"/>
+            <a:off x="804672" y="5534914"/>
+            <a:ext cx="2743200" cy="182880"/>
           </a:xfrm>
           <a:prstGeom prst="rect">
             <a:avLst/>
@@ -13043,8 +12795,8 @@
         </p:nvSpPr>
         <p:spPr>
           <a:xfrm>
-            <a:off x="804672" y="6534976"/>
-            <a:ext cx="10582351" cy="232220"/>
+            <a:off x="804672" y="5717794"/>
+            <a:ext cx="10582351" cy="212649"/>
           </a:xfrm>
           <a:prstGeom prst="rect">
             <a:avLst/>
@@ -13058,12 +12810,12 @@
           <a:p>
             <a:pPr indent="0" marL="0">
               <a:lnSpc>
-                <a:spcPts val="1725"/>
+                <a:spcPts val="1610"/>
               </a:lnSpc>
               <a:buNone/>
             </a:pPr>
             <a:r>
-              <a:rPr lang="en-US" sz="1500" b="1" dirty="0">
+              <a:rPr lang="en-US" sz="1400" b="1" dirty="0">
                 <a:solidFill>
                   <a:srgbClr val="0A1426"/>
                 </a:solidFill>
@@ -13073,7 +12825,7 @@
               </a:rPr>
               <a:t>₹90 crore pre-money prices most of the growth in</a:t>
             </a:r>
-            <a:endParaRPr lang="en-US" sz="1500" dirty="0"/>
+            <a:endParaRPr lang="en-US" sz="1400" dirty="0"/>
           </a:p>
         </p:txBody>
       </p:sp>
@@ -13085,8 +12837,8 @@
         </p:nvSpPr>
         <p:spPr>
           <a:xfrm>
-            <a:off x="804672" y="6840347"/>
-            <a:ext cx="10582351" cy="182880"/>
+            <a:off x="804672" y="5985307"/>
+            <a:ext cx="10582351" cy="296814"/>
           </a:xfrm>
           <a:prstGeom prst="rect">
             <a:avLst/>
@@ -13100,12 +12852,12 @@
           <a:p>
             <a:pPr indent="0" marL="0">
               <a:lnSpc>
-                <a:spcPts val="1207"/>
+                <a:spcPts val="1278"/>
               </a:lnSpc>
               <a:buNone/>
             </a:pPr>
             <a:r>
-              <a:rPr lang="en-US" sz="850" dirty="0">
+              <a:rPr lang="en-US" sz="900" dirty="0">
                 <a:solidFill>
                   <a:srgbClr val="3B4660"/>
                 </a:solidFill>
@@ -13113,9 +12865,9 @@
                 <a:ea typeface="Calibri" pitchFamily="34" charset="-122"/>
                 <a:cs typeface="Calibri" pitchFamily="34" charset="-120"/>
               </a:rPr>
-              <a:t>On this plan an investor entering at ₹90 crore pre-money earns 13.8% over five years — respectable for a family office or strategic, below what an institutional growth fund underwrites to. Not an argument that the valuation is wrong; an argument about who the right counterparty is, and how long the round takes to close.</a:t>
+              <a:t>At ₹90 crore pre-money an investor earns 13.8% over five years — an argument about counterparty, not valuation.</a:t>
             </a:r>
-            <a:endParaRPr lang="en-US" sz="850" dirty="0"/>
+            <a:endParaRPr lang="en-US" sz="900" dirty="0"/>
           </a:p>
         </p:txBody>
       </p:sp>
@@ -13296,8 +13048,8 @@
         </p:nvSpPr>
         <p:spPr>
           <a:xfrm>
-            <a:off x="566928" y="1005840"/>
-            <a:ext cx="11057839" cy="512064"/>
+            <a:off x="566928" y="950976"/>
+            <a:ext cx="11057839" cy="231140"/>
           </a:xfrm>
           <a:prstGeom prst="rect">
             <a:avLst/>
@@ -13311,12 +13063,12 @@
           <a:p>
             <a:pPr indent="0" marL="0">
               <a:lnSpc>
-                <a:spcPts val="1900"/>
+                <a:spcPts val="1750"/>
               </a:lnSpc>
               <a:buNone/>
             </a:pPr>
             <a:r>
-              <a:rPr lang="en-US" sz="1350" dirty="0">
+              <a:rPr lang="en-US" sz="1250" dirty="0">
                 <a:solidFill>
                   <a:srgbClr val="3B4660"/>
                 </a:solidFill>
@@ -13326,7 +13078,7 @@
               </a:rPr>
               <a:t>A single collateral-free composite facility: a term loan for the project build-outs and a working-capital limit that consolidates the NBFC book.</a:t>
             </a:r>
-            <a:endParaRPr lang="en-US" sz="1350" dirty="0"/>
+            <a:endParaRPr lang="en-US" sz="1250" dirty="0"/>
           </a:p>
         </p:txBody>
       </p:sp>
@@ -13337,8 +13089,8 @@
           <p:nvPr/>
         </p:nvGraphicFramePr>
         <p:xfrm>
-          <a:off x="566928" y="1627632"/>
-          <a:ext cx="11057839" cy="2514600"/>
+          <a:off x="566928" y="1310132"/>
+          <a:ext cx="11057839" cy="2194560"/>
         </p:xfrm>
         <a:graphic xmlns:a="http://schemas.openxmlformats.org/drawingml/2006/main">
           <a:graphicData uri="http://schemas.openxmlformats.org/drawingml/2006/chart">
@@ -13354,12 +13106,12 @@
         </p:nvSpPr>
         <p:spPr>
           <a:xfrm>
-            <a:off x="566928" y="4343400"/>
-            <a:ext cx="2599868" cy="1280160"/>
+            <a:off x="566928" y="3705860"/>
+            <a:ext cx="2599868" cy="1207008"/>
           </a:xfrm>
           <a:prstGeom prst="roundRect">
             <a:avLst>
-              <a:gd name="adj" fmla="val 4286"/>
+              <a:gd name="adj" fmla="val 4545"/>
             </a:avLst>
           </a:prstGeom>
           <a:solidFill>
@@ -13381,8 +13133,8 @@
         </p:nvSpPr>
         <p:spPr>
           <a:xfrm>
-            <a:off x="749808" y="4480560"/>
-            <a:ext cx="2234108" cy="219456"/>
+            <a:off x="749808" y="3824732"/>
+            <a:ext cx="2234108" cy="237744"/>
           </a:xfrm>
           <a:prstGeom prst="rect">
             <a:avLst/>
@@ -13391,14 +13143,14 @@
           <a:ln/>
         </p:spPr>
         <p:txBody>
-          <a:bodyPr wrap="square" lIns="0" tIns="0" rIns="0" bIns="0" rtlCol="0" anchor="ctr"/>
+          <a:bodyPr wrap="square" lIns="0" tIns="0" rIns="0" bIns="0" rtlCol="0" anchor="t"/>
           <a:lstStyle/>
           <a:p>
             <a:pPr indent="0" marL="0">
               <a:buNone/>
             </a:pPr>
             <a:r>
-              <a:rPr lang="en-US" sz="900" b="1" spc="120" kern="0" dirty="0">
+              <a:rPr lang="en-US" sz="850" b="1" spc="100" kern="0" dirty="0">
                 <a:solidFill>
                   <a:srgbClr val="6E7689"/>
                 </a:solidFill>
@@ -13408,7 +13160,7 @@
               </a:rPr>
               <a:t>TOTAL FACILITY</a:t>
             </a:r>
-            <a:endParaRPr lang="en-US" sz="900" dirty="0"/>
+            <a:endParaRPr lang="en-US" sz="850" dirty="0"/>
           </a:p>
         </p:txBody>
       </p:sp>
@@ -13420,7 +13172,7 @@
         </p:nvSpPr>
         <p:spPr>
           <a:xfrm>
-            <a:off x="749808" y="4709160"/>
+            <a:off x="749808" y="4071620"/>
             <a:ext cx="2234108" cy="457200"/>
           </a:xfrm>
           <a:prstGeom prst="rect">
@@ -13430,7 +13182,9 @@
           <a:ln/>
         </p:spPr>
         <p:txBody>
-          <a:bodyPr wrap="square" lIns="0" tIns="0" rIns="0" bIns="0" rtlCol="0" anchor="t"/>
+          <a:bodyPr wrap="square" lIns="0" tIns="0" rIns="0" bIns="0" rtlCol="0" anchor="t">
+            <a:normAutofit/>
+          </a:bodyPr>
           <a:lstStyle/>
           <a:p>
             <a:pPr indent="0" marL="0">
@@ -13459,8 +13213,8 @@
         </p:nvSpPr>
         <p:spPr>
           <a:xfrm>
-            <a:off x="749808" y="5184648"/>
-            <a:ext cx="2234108" cy="365760"/>
+            <a:off x="749808" y="4547108"/>
+            <a:ext cx="2234108" cy="292608"/>
           </a:xfrm>
           <a:prstGeom prst="rect">
             <a:avLst/>
@@ -13501,12 +13255,12 @@
         </p:nvSpPr>
         <p:spPr>
           <a:xfrm>
-            <a:off x="3386252" y="4343400"/>
-            <a:ext cx="2599868" cy="1280160"/>
+            <a:off x="3386252" y="3705860"/>
+            <a:ext cx="2599868" cy="1207008"/>
           </a:xfrm>
           <a:prstGeom prst="roundRect">
             <a:avLst>
-              <a:gd name="adj" fmla="val 4286"/>
+              <a:gd name="adj" fmla="val 4545"/>
             </a:avLst>
           </a:prstGeom>
           <a:solidFill>
@@ -13528,8 +13282,8 @@
         </p:nvSpPr>
         <p:spPr>
           <a:xfrm>
-            <a:off x="3569132" y="4480560"/>
-            <a:ext cx="2234108" cy="219456"/>
+            <a:off x="3569132" y="3824732"/>
+            <a:ext cx="2234108" cy="237744"/>
           </a:xfrm>
           <a:prstGeom prst="rect">
             <a:avLst/>
@@ -13538,14 +13292,14 @@
           <a:ln/>
         </p:spPr>
         <p:txBody>
-          <a:bodyPr wrap="square" lIns="0" tIns="0" rIns="0" bIns="0" rtlCol="0" anchor="ctr"/>
+          <a:bodyPr wrap="square" lIns="0" tIns="0" rIns="0" bIns="0" rtlCol="0" anchor="t"/>
           <a:lstStyle/>
           <a:p>
             <a:pPr indent="0" marL="0">
               <a:buNone/>
             </a:pPr>
             <a:r>
-              <a:rPr lang="en-US" sz="900" b="1" spc="120" kern="0" dirty="0">
+              <a:rPr lang="en-US" sz="850" b="1" spc="100" kern="0" dirty="0">
                 <a:solidFill>
                   <a:srgbClr val="6E7689"/>
                 </a:solidFill>
@@ -13555,7 +13309,7 @@
               </a:rPr>
               <a:t>ALL-IN COST</a:t>
             </a:r>
-            <a:endParaRPr lang="en-US" sz="900" dirty="0"/>
+            <a:endParaRPr lang="en-US" sz="850" dirty="0"/>
           </a:p>
         </p:txBody>
       </p:sp>
@@ -13567,7 +13321,7 @@
         </p:nvSpPr>
         <p:spPr>
           <a:xfrm>
-            <a:off x="3569132" y="4709160"/>
+            <a:off x="3569132" y="4071620"/>
             <a:ext cx="2234108" cy="457200"/>
           </a:xfrm>
           <a:prstGeom prst="rect">
@@ -13577,7 +13331,9 @@
           <a:ln/>
         </p:spPr>
         <p:txBody>
-          <a:bodyPr wrap="square" lIns="0" tIns="0" rIns="0" bIns="0" rtlCol="0" anchor="t"/>
+          <a:bodyPr wrap="square" lIns="0" tIns="0" rIns="0" bIns="0" rtlCol="0" anchor="t">
+            <a:normAutofit/>
+          </a:bodyPr>
           <a:lstStyle/>
           <a:p>
             <a:pPr indent="0" marL="0">
@@ -13606,8 +13362,8 @@
         </p:nvSpPr>
         <p:spPr>
           <a:xfrm>
-            <a:off x="3569132" y="5184648"/>
-            <a:ext cx="2234108" cy="365760"/>
+            <a:off x="3569132" y="4547108"/>
+            <a:ext cx="2234108" cy="292608"/>
           </a:xfrm>
           <a:prstGeom prst="rect">
             <a:avLst/>
@@ -13648,12 +13404,12 @@
         </p:nvSpPr>
         <p:spPr>
           <a:xfrm>
-            <a:off x="6205576" y="4343400"/>
-            <a:ext cx="2599868" cy="1280160"/>
+            <a:off x="6205576" y="3705860"/>
+            <a:ext cx="2599868" cy="1207008"/>
           </a:xfrm>
           <a:prstGeom prst="roundRect">
             <a:avLst>
-              <a:gd name="adj" fmla="val 4286"/>
+              <a:gd name="adj" fmla="val 4545"/>
             </a:avLst>
           </a:prstGeom>
           <a:solidFill>
@@ -13675,8 +13431,8 @@
         </p:nvSpPr>
         <p:spPr>
           <a:xfrm>
-            <a:off x="6388456" y="4480560"/>
-            <a:ext cx="2234108" cy="219456"/>
+            <a:off x="6388456" y="3824732"/>
+            <a:ext cx="2234108" cy="237744"/>
           </a:xfrm>
           <a:prstGeom prst="rect">
             <a:avLst/>
@@ -13685,14 +13441,14 @@
           <a:ln/>
         </p:spPr>
         <p:txBody>
-          <a:bodyPr wrap="square" lIns="0" tIns="0" rIns="0" bIns="0" rtlCol="0" anchor="ctr"/>
+          <a:bodyPr wrap="square" lIns="0" tIns="0" rIns="0" bIns="0" rtlCol="0" anchor="t"/>
           <a:lstStyle/>
           <a:p>
             <a:pPr indent="0" marL="0">
               <a:buNone/>
             </a:pPr>
             <a:r>
-              <a:rPr lang="en-US" sz="900" b="1" spc="120" kern="0" dirty="0">
+              <a:rPr lang="en-US" sz="850" b="1" spc="100" kern="0" dirty="0">
                 <a:solidFill>
                   <a:srgbClr val="6E7689"/>
                 </a:solidFill>
@@ -13702,7 +13458,7 @@
               </a:rPr>
               <a:t>MINIMUM DSCR</a:t>
             </a:r>
-            <a:endParaRPr lang="en-US" sz="900" dirty="0"/>
+            <a:endParaRPr lang="en-US" sz="850" dirty="0"/>
           </a:p>
         </p:txBody>
       </p:sp>
@@ -13714,7 +13470,7 @@
         </p:nvSpPr>
         <p:spPr>
           <a:xfrm>
-            <a:off x="6388456" y="4709160"/>
+            <a:off x="6388456" y="4071620"/>
             <a:ext cx="2234108" cy="457200"/>
           </a:xfrm>
           <a:prstGeom prst="rect">
@@ -13724,7 +13480,9 @@
           <a:ln/>
         </p:spPr>
         <p:txBody>
-          <a:bodyPr wrap="square" lIns="0" tIns="0" rIns="0" bIns="0" rtlCol="0" anchor="t"/>
+          <a:bodyPr wrap="square" lIns="0" tIns="0" rIns="0" bIns="0" rtlCol="0" anchor="t">
+            <a:normAutofit/>
+          </a:bodyPr>
           <a:lstStyle/>
           <a:p>
             <a:pPr indent="0" marL="0">
@@ -13753,8 +13511,8 @@
         </p:nvSpPr>
         <p:spPr>
           <a:xfrm>
-            <a:off x="6388456" y="5184648"/>
-            <a:ext cx="2234108" cy="365760"/>
+            <a:off x="6388456" y="4547108"/>
+            <a:ext cx="2234108" cy="292608"/>
           </a:xfrm>
           <a:prstGeom prst="rect">
             <a:avLst/>
@@ -13795,12 +13553,12 @@
         </p:nvSpPr>
         <p:spPr>
           <a:xfrm>
-            <a:off x="9024899" y="4343400"/>
-            <a:ext cx="2599868" cy="1280160"/>
+            <a:off x="9024899" y="3705860"/>
+            <a:ext cx="2599868" cy="1207008"/>
           </a:xfrm>
           <a:prstGeom prst="roundRect">
             <a:avLst>
-              <a:gd name="adj" fmla="val 4286"/>
+              <a:gd name="adj" fmla="val 4545"/>
             </a:avLst>
           </a:prstGeom>
           <a:solidFill>
@@ -13822,8 +13580,8 @@
         </p:nvSpPr>
         <p:spPr>
           <a:xfrm>
-            <a:off x="9207779" y="4480560"/>
-            <a:ext cx="2234108" cy="219456"/>
+            <a:off x="9207779" y="3824732"/>
+            <a:ext cx="2234108" cy="237744"/>
           </a:xfrm>
           <a:prstGeom prst="rect">
             <a:avLst/>
@@ -13832,14 +13590,14 @@
           <a:ln/>
         </p:spPr>
         <p:txBody>
-          <a:bodyPr wrap="square" lIns="0" tIns="0" rIns="0" bIns="0" rtlCol="0" anchor="ctr"/>
+          <a:bodyPr wrap="square" lIns="0" tIns="0" rIns="0" bIns="0" rtlCol="0" anchor="t"/>
           <a:lstStyle/>
           <a:p>
             <a:pPr indent="0" marL="0">
               <a:buNone/>
             </a:pPr>
             <a:r>
-              <a:rPr lang="en-US" sz="900" b="1" spc="120" kern="0" dirty="0">
+              <a:rPr lang="en-US" sz="850" b="1" spc="100" kern="0" dirty="0">
                 <a:solidFill>
                   <a:srgbClr val="6E7689"/>
                 </a:solidFill>
@@ -13849,7 +13607,7 @@
               </a:rPr>
               <a:t>TOTAL FINANCE COST</a:t>
             </a:r>
-            <a:endParaRPr lang="en-US" sz="900" dirty="0"/>
+            <a:endParaRPr lang="en-US" sz="850" dirty="0"/>
           </a:p>
         </p:txBody>
       </p:sp>
@@ -13861,7 +13619,7 @@
         </p:nvSpPr>
         <p:spPr>
           <a:xfrm>
-            <a:off x="9207779" y="4709160"/>
+            <a:off x="9207779" y="4071620"/>
             <a:ext cx="2234108" cy="457200"/>
           </a:xfrm>
           <a:prstGeom prst="rect">
@@ -13871,7 +13629,9 @@
           <a:ln/>
         </p:spPr>
         <p:txBody>
-          <a:bodyPr wrap="square" lIns="0" tIns="0" rIns="0" bIns="0" rtlCol="0" anchor="t"/>
+          <a:bodyPr wrap="square" lIns="0" tIns="0" rIns="0" bIns="0" rtlCol="0" anchor="t">
+            <a:normAutofit/>
+          </a:bodyPr>
           <a:lstStyle/>
           <a:p>
             <a:pPr indent="0" marL="0">
@@ -13900,8 +13660,8 @@
         </p:nvSpPr>
         <p:spPr>
           <a:xfrm>
-            <a:off x="9207779" y="5184648"/>
-            <a:ext cx="2234108" cy="365760"/>
+            <a:off x="9207779" y="4547108"/>
+            <a:ext cx="2234108" cy="292608"/>
           </a:xfrm>
           <a:prstGeom prst="rect">
             <a:avLst/>
@@ -13942,12 +13702,12 @@
         </p:nvSpPr>
         <p:spPr>
           <a:xfrm>
-            <a:off x="566928" y="5879592"/>
-            <a:ext cx="11057839" cy="731520"/>
+            <a:off x="566928" y="5168900"/>
+            <a:ext cx="11057839" cy="1062299"/>
           </a:xfrm>
           <a:prstGeom prst="roundRect">
             <a:avLst>
-              <a:gd name="adj" fmla="val 6250"/>
+              <a:gd name="adj" fmla="val 4304"/>
             </a:avLst>
           </a:prstGeom>
           <a:solidFill>
@@ -13969,8 +13729,8 @@
         </p:nvSpPr>
         <p:spPr>
           <a:xfrm>
-            <a:off x="804672" y="6025896"/>
-            <a:ext cx="2743200" cy="201168"/>
+            <a:off x="804672" y="5278628"/>
+            <a:ext cx="2743200" cy="182880"/>
           </a:xfrm>
           <a:prstGeom prst="rect">
             <a:avLst/>
@@ -14008,8 +13768,8 @@
         </p:nvSpPr>
         <p:spPr>
           <a:xfrm>
-            <a:off x="804672" y="6227064"/>
-            <a:ext cx="10582351" cy="232220"/>
+            <a:off x="804672" y="5461508"/>
+            <a:ext cx="10582351" cy="288595"/>
           </a:xfrm>
           <a:prstGeom prst="rect">
             <a:avLst/>
@@ -14023,12 +13783,12 @@
           <a:p>
             <a:pPr indent="0" marL="0">
               <a:lnSpc>
-                <a:spcPts val="1725"/>
+                <a:spcPts val="2185"/>
               </a:lnSpc>
               <a:buNone/>
             </a:pPr>
             <a:r>
-              <a:rPr lang="en-US" sz="1500" b="1" dirty="0">
+              <a:rPr lang="en-US" sz="1900" b="1" dirty="0">
                 <a:solidFill>
                   <a:srgbClr val="0A1426"/>
                 </a:solidFill>
@@ -14038,7 +13798,7 @@
               </a:rPr>
               <a:t>The debt is roughly a fifth of the cost of the equity</a:t>
             </a:r>
-            <a:endParaRPr lang="en-US" sz="1500" dirty="0"/>
+            <a:endParaRPr lang="en-US" sz="1900" dirty="0"/>
           </a:p>
         </p:txBody>
       </p:sp>
@@ -14050,8 +13810,8 @@
         </p:nvSpPr>
         <p:spPr>
           <a:xfrm>
-            <a:off x="804672" y="6532436"/>
-            <a:ext cx="10582351" cy="182880"/>
+            <a:off x="804672" y="5804967"/>
+            <a:ext cx="10582351" cy="353080"/>
           </a:xfrm>
           <a:prstGeom prst="rect">
             <a:avLst/>
@@ -14065,12 +13825,12 @@
           <a:p>
             <a:pPr indent="0" marL="0">
               <a:lnSpc>
-                <a:spcPts val="1207"/>
+                <a:spcPts val="1704"/>
               </a:lnSpc>
               <a:buNone/>
             </a:pPr>
             <a:r>
-              <a:rPr lang="en-US" sz="850" dirty="0">
+              <a:rPr lang="en-US" sz="1200" dirty="0">
                 <a:solidFill>
                   <a:srgbClr val="3B4660"/>
                 </a:solidFill>
@@ -14078,9 +13838,9 @@
                 <a:ea typeface="Calibri" pitchFamily="34" charset="-122"/>
                 <a:cs typeface="Calibri" pitchFamily="34" charset="-120"/>
               </a:rPr>
-              <a:t>A ₹10 Cr collateral-free facility at 12.70% all-in costs ₹5.70 Cr over seven years — against 15.1% of a company this plan values at ₹202 Cr in FY30-31, or ₹30 Cr. On the company's own projections.</a:t>
+              <a:t>₹10 Cr collateral-free at 12.70% costs ₹5.70 Cr over seven years — against ₹30 Cr for the equivalent equity, on the company's own projections.</a:t>
             </a:r>
-            <a:endParaRPr lang="en-US" sz="850" dirty="0"/>
+            <a:endParaRPr lang="en-US" sz="1200" dirty="0"/>
           </a:p>
         </p:txBody>
       </p:sp>
@@ -14261,8 +14021,8 @@
         </p:nvSpPr>
         <p:spPr>
           <a:xfrm>
-            <a:off x="566928" y="1005840"/>
-            <a:ext cx="11057839" cy="512064"/>
+            <a:off x="566928" y="950976"/>
+            <a:ext cx="11057839" cy="462280"/>
           </a:xfrm>
           <a:prstGeom prst="rect">
             <a:avLst/>
@@ -14276,12 +14036,12 @@
           <a:p>
             <a:pPr indent="0" marL="0">
               <a:lnSpc>
-                <a:spcPts val="1900"/>
+                <a:spcPts val="1750"/>
               </a:lnSpc>
               <a:buNone/>
             </a:pPr>
             <a:r>
-              <a:rPr lang="en-US" sz="1350" dirty="0">
+              <a:rPr lang="en-US" sz="1250" dirty="0">
                 <a:solidFill>
                   <a:srgbClr val="3B4660"/>
                 </a:solidFill>
@@ -14291,7 +14051,7 @@
               </a:rPr>
               <a:t>Money in as debt at a coupon, converting into equity on a fixed formula three years out. At company level — unlike at project level — this is genuinely competitive with both alternatives.</a:t>
             </a:r>
-            <a:endParaRPr lang="en-US" sz="1350" dirty="0"/>
+            <a:endParaRPr lang="en-US" sz="1250" dirty="0"/>
           </a:p>
         </p:txBody>
       </p:sp>
@@ -14310,7 +14070,7 @@
           </p:nvPr>
         </p:nvGraphicFramePr>
         <p:xfrm>
-          <a:off x="566928" y="1627632"/>
+          <a:off x="566928" y="1541272"/>
           <a:ext cx="11057839" cy="914400"/>
         </p:xfrm>
         <a:graphic>
@@ -15437,12 +15197,12 @@
         </p:nvSpPr>
         <p:spPr>
           <a:xfrm>
-            <a:off x="566928" y="4496118"/>
-            <a:ext cx="11057839" cy="1640690"/>
+            <a:off x="566928" y="4348734"/>
+            <a:ext cx="11057839" cy="1962556"/>
           </a:xfrm>
           <a:prstGeom prst="roundRect">
             <a:avLst>
-              <a:gd name="adj" fmla="val 2787"/>
+              <a:gd name="adj" fmla="val 2330"/>
             </a:avLst>
           </a:prstGeom>
           <a:solidFill>
@@ -15464,8 +15224,8 @@
         </p:nvSpPr>
         <p:spPr>
           <a:xfrm>
-            <a:off x="804672" y="4642422"/>
-            <a:ext cx="2743200" cy="201168"/>
+            <a:off x="804672" y="4458462"/>
+            <a:ext cx="2743200" cy="182880"/>
           </a:xfrm>
           <a:prstGeom prst="rect">
             <a:avLst/>
@@ -15503,8 +15263,8 @@
         </p:nvSpPr>
         <p:spPr>
           <a:xfrm>
-            <a:off x="804672" y="4843590"/>
-            <a:ext cx="10582351" cy="294145"/>
+            <a:off x="804672" y="4641342"/>
+            <a:ext cx="10582351" cy="288595"/>
           </a:xfrm>
           <a:prstGeom prst="rect">
             <a:avLst/>
@@ -15531,7 +15291,7 @@
                 <a:ea typeface="Calibri" pitchFamily="34" charset="-122"/>
                 <a:cs typeface="Calibri" pitchFamily="34" charset="-120"/>
               </a:rPr>
-              <a:t>The best risk-adjusted structure for an outside investor</a:t>
+              <a:t>The best risk-adjusted structure — with one condition</a:t>
             </a:r>
             <a:endParaRPr lang="en-US" sz="1900" dirty="0"/>
           </a:p>
@@ -15545,8 +15305,8 @@
         </p:nvSpPr>
         <p:spPr>
           <a:xfrm>
-            <a:off x="804672" y="5210886"/>
-            <a:ext cx="10582351" cy="852769"/>
+            <a:off x="804672" y="4984801"/>
+            <a:ext cx="10582351" cy="1253338"/>
           </a:xfrm>
           <a:prstGeom prst="rect">
             <a:avLst/>
@@ -15573,149 +15333,28 @@
                 <a:ea typeface="Calibri" pitchFamily="34" charset="-122"/>
                 <a:cs typeface="Calibri" pitchFamily="34" charset="-120"/>
               </a:rPr>
-              <a:t>21.3% against 13.8% for straight equity at the same valuation and the same exit. The difference comes from three years of coupon and from entering as a creditor while the three new projects are unproven. For VAPPL the trade is symmetrical: dilution deferred three years, and if the projects deliver, 13.0% converted at a ₹92 Cr implied valuation is cheaper than 15.1% sold today at ₹90 crore pre-money.</a:t>
+              <a:t>21.3% against 13.8% for straight equity at the same valuation and exit. Dilution is deferred three years, and 13.0% converted at ₹92 Cr is cheaper than 15.1% sold today at ₹90 crore pre-money.</a:t>
             </a:r>
             <a:endParaRPr lang="en-US" sz="1200" dirty="0"/>
           </a:p>
-        </p:txBody>
-      </p:sp>
-      <p:sp>
-        <p:nvSpPr>
-          <p:cNvPr id="11" name="Shape 8"/>
-          <p:cNvSpPr/>
-          <p:nvPr/>
-        </p:nvSpPr>
-        <p:spPr>
-          <a:xfrm>
-            <a:off x="566928" y="6337976"/>
-            <a:ext cx="11057839" cy="731520"/>
-          </a:xfrm>
-          <a:prstGeom prst="roundRect">
-            <a:avLst>
-              <a:gd name="adj" fmla="val 6250"/>
-            </a:avLst>
-          </a:prstGeom>
-          <a:solidFill>
-            <a:srgbClr val="FBEFEC"/>
-          </a:solidFill>
-          <a:ln w="15875">
-            <a:solidFill>
-              <a:srgbClr val="C8553D"/>
-            </a:solidFill>
-            <a:prstDash val="solid"/>
-          </a:ln>
-        </p:spPr>
-      </p:sp>
-      <p:sp>
-        <p:nvSpPr>
-          <p:cNvPr id="12" name="Text 9"/>
-          <p:cNvSpPr/>
-          <p:nvPr/>
-        </p:nvSpPr>
-        <p:spPr>
-          <a:xfrm>
-            <a:off x="804672" y="6484280"/>
-            <a:ext cx="2743200" cy="201168"/>
-          </a:xfrm>
-          <a:prstGeom prst="rect">
-            <a:avLst/>
-          </a:prstGeom>
-          <a:noFill/>
-          <a:ln/>
-        </p:spPr>
-        <p:txBody>
-          <a:bodyPr wrap="square" lIns="0" tIns="0" rIns="0" bIns="0" rtlCol="0" anchor="ctr"/>
-          <a:lstStyle/>
           <a:p>
             <a:pPr indent="0" marL="0">
+              <a:lnSpc>
+                <a:spcPts val="1704"/>
+              </a:lnSpc>
               <a:buNone/>
             </a:pPr>
-            <a:r>
-              <a:rPr lang="en-US" sz="850" b="1" spc="160" kern="0" dirty="0">
-                <a:solidFill>
-                  <a:srgbClr val="C8553D"/>
-                </a:solidFill>
-                <a:latin typeface="Calibri" pitchFamily="34" charset="0"/>
-                <a:ea typeface="Calibri" pitchFamily="34" charset="-122"/>
-                <a:cs typeface="Calibri" pitchFamily="34" charset="-120"/>
-              </a:rPr>
-              <a:t>VERDICT</a:t>
-            </a:r>
-            <a:endParaRPr lang="en-US" sz="850" dirty="0"/>
-          </a:p>
-        </p:txBody>
-      </p:sp>
-      <p:sp>
-        <p:nvSpPr>
-          <p:cNvPr id="13" name="Text 10"/>
-          <p:cNvSpPr/>
-          <p:nvPr/>
-        </p:nvSpPr>
-        <p:spPr>
-          <a:xfrm>
-            <a:off x="804672" y="6685448"/>
-            <a:ext cx="10582351" cy="232220"/>
-          </a:xfrm>
-          <a:prstGeom prst="rect">
-            <a:avLst/>
-          </a:prstGeom>
-          <a:noFill/>
-          <a:ln/>
-        </p:spPr>
-        <p:txBody>
-          <a:bodyPr wrap="square" lIns="0" tIns="0" rIns="0" bIns="0" rtlCol="0" anchor="t"/>
-          <a:lstStyle/>
+            <a:endParaRPr lang="en-US" sz="1200" dirty="0"/>
+          </a:p>
           <a:p>
             <a:pPr indent="0" marL="0">
               <a:lnSpc>
-                <a:spcPts val="1725"/>
+                <a:spcPts val="1704"/>
               </a:lnSpc>
               <a:buNone/>
             </a:pPr>
             <a:r>
-              <a:rPr lang="en-US" sz="1500" b="1" dirty="0">
-                <a:solidFill>
-                  <a:srgbClr val="0A1426"/>
-                </a:solidFill>
-                <a:latin typeface="Calibri" pitchFamily="34" charset="0"/>
-                <a:ea typeface="Calibri" pitchFamily="34" charset="-122"/>
-                <a:cs typeface="Calibri" pitchFamily="34" charset="-120"/>
-              </a:rPr>
-              <a:t>The covenant problem — and it is not optional</a:t>
-            </a:r>
-            <a:endParaRPr lang="en-US" sz="1500" dirty="0"/>
-          </a:p>
-        </p:txBody>
-      </p:sp>
-      <p:sp>
-        <p:nvSpPr>
-          <p:cNvPr id="14" name="Text 11"/>
-          <p:cNvSpPr/>
-          <p:nvPr/>
-        </p:nvSpPr>
-        <p:spPr>
-          <a:xfrm>
-            <a:off x="804672" y="6990819"/>
-            <a:ext cx="10582351" cy="182880"/>
-          </a:xfrm>
-          <a:prstGeom prst="rect">
-            <a:avLst/>
-          </a:prstGeom>
-          <a:noFill/>
-          <a:ln/>
-        </p:spPr>
-        <p:txBody>
-          <a:bodyPr wrap="square" lIns="0" tIns="0" rIns="0" bIns="0" rtlCol="0" anchor="t"/>
-          <a:lstStyle/>
-          <a:p>
-            <a:pPr indent="0" marL="0">
-              <a:lnSpc>
-                <a:spcPts val="1207"/>
-              </a:lnSpc>
-              <a:buNone/>
-            </a:pPr>
-            <a:r>
-              <a:rPr lang="en-US" sz="850" dirty="0">
+              <a:rPr lang="en-US" sz="1200" dirty="0">
                 <a:solidFill>
                   <a:srgbClr val="3B4660"/>
                 </a:solidFill>
@@ -15723,15 +15362,15 @@
                 <a:ea typeface="Calibri" pitchFamily="34" charset="-122"/>
                 <a:cs typeface="Calibri" pitchFamily="34" charset="-120"/>
               </a:rPr>
-              <a:t>CCDs sit as borrowings until conversion. Convert the related-party debt first, or negotiate the CGTMSE leverage covenant to exclude compulsorily convertible instruments — standard practice, since a CCD that must convert is quasi-equity, but it has to be agreed in the sanction letter rather than argued later.</a:t>
+              <a:t>The condition: a CCD is borrowing until it converts. Convert the related-party debt first, or agree in the sanction letter that the CGTMSE leverage covenant excludes compulsorily convertible instruments.</a:t>
             </a:r>
-            <a:endParaRPr lang="en-US" sz="850" dirty="0"/>
+            <a:endParaRPr lang="en-US" sz="1200" dirty="0"/>
           </a:p>
         </p:txBody>
       </p:sp>
       <p:sp>
         <p:nvSpPr>
-          <p:cNvPr id="15" name="Text 12"/>
+          <p:cNvPr id="11" name="Text 8"/>
           <p:cNvSpPr/>
           <p:nvPr/>
         </p:nvSpPr>
@@ -17632,11 +17271,11 @@
         <p:spPr>
           <a:xfrm>
             <a:off x="566928" y="4169664"/>
-            <a:ext cx="11057839" cy="1640690"/>
+            <a:ext cx="11057839" cy="1536192"/>
           </a:xfrm>
           <a:prstGeom prst="roundRect">
             <a:avLst>
-              <a:gd name="adj" fmla="val 2787"/>
+              <a:gd name="adj" fmla="val 2976"/>
             </a:avLst>
           </a:prstGeom>
           <a:solidFill>
@@ -17658,8 +17297,8 @@
         </p:nvSpPr>
         <p:spPr>
           <a:xfrm>
-            <a:off x="804672" y="4315968"/>
-            <a:ext cx="2743200" cy="201168"/>
+            <a:off x="804672" y="4279392"/>
+            <a:ext cx="2743200" cy="182880"/>
           </a:xfrm>
           <a:prstGeom prst="rect">
             <a:avLst/>
@@ -17697,8 +17336,8 @@
         </p:nvSpPr>
         <p:spPr>
           <a:xfrm>
-            <a:off x="804672" y="4517136"/>
-            <a:ext cx="10582351" cy="294145"/>
+            <a:off x="804672" y="4462272"/>
+            <a:ext cx="10582351" cy="288595"/>
           </a:xfrm>
           <a:prstGeom prst="rect">
             <a:avLst/>
@@ -17739,8 +17378,8 @@
         </p:nvSpPr>
         <p:spPr>
           <a:xfrm>
-            <a:off x="804672" y="4884433"/>
-            <a:ext cx="10582351" cy="852769"/>
+            <a:off x="804672" y="4805731"/>
+            <a:ext cx="10582351" cy="826973"/>
           </a:xfrm>
           <a:prstGeom prst="rect">
             <a:avLst/>

--- a/pptx/EOD-Company-Capital-Structure.pptx
+++ b/pptx/EOD-Company-Capital-Structure.pptx
@@ -629,19 +629,19 @@
                 <c:formatCode>General</c:formatCode>
                 <c:ptCount val="5"/>
                 <c:pt idx="0">
-                  <c:v>0.98</c:v>
+                  <c:v>1.24</c:v>
                 </c:pt>
                 <c:pt idx="1">
-                  <c:v>2.33</c:v>
+                  <c:v>2.81</c:v>
                 </c:pt>
                 <c:pt idx="2">
-                  <c:v>3.04</c:v>
+                  <c:v>3.44</c:v>
                 </c:pt>
                 <c:pt idx="3">
-                  <c:v>3.64</c:v>
+                  <c:v>3.99</c:v>
                 </c:pt>
                 <c:pt idx="4">
-                  <c:v>4.2</c:v>
+                  <c:v>4.48</c:v>
                 </c:pt>
               </c:numCache>
             </c:numRef>
@@ -1347,25 +1347,25 @@
                 <c:formatCode>General</c:formatCode>
                 <c:ptCount val="7"/>
                 <c:pt idx="0">
-                  <c:v>5.4</c:v>
+                  <c:v>5.58</c:v>
                 </c:pt>
                 <c:pt idx="1">
-                  <c:v>7.18</c:v>
+                  <c:v>7.54</c:v>
                 </c:pt>
                 <c:pt idx="2">
-                  <c:v>13.01</c:v>
+                  <c:v>13.37</c:v>
                 </c:pt>
                 <c:pt idx="3">
-                  <c:v>16.71</c:v>
+                  <c:v>17.08</c:v>
                 </c:pt>
                 <c:pt idx="4">
-                  <c:v>19.89</c:v>
+                  <c:v>20.24</c:v>
                 </c:pt>
                 <c:pt idx="5">
-                  <c:v>21.08</c:v>
+                  <c:v>21.46</c:v>
                 </c:pt>
                 <c:pt idx="6">
-                  <c:v>22.27</c:v>
+                  <c:v>22.67</c:v>
                 </c:pt>
               </c:numCache>
             </c:numRef>
@@ -3546,7 +3546,7 @@
                 <a:ea typeface="Calibri" pitchFamily="34" charset="-122"/>
                 <a:cs typeface="Calibri" pitchFamily="34" charset="-120"/>
               </a:rPr>
-              <a:t>13.8%</a:t>
+              <a:t>13.9%</a:t>
             </a:r>
             <a:endParaRPr lang="en-US" sz="2900" dirty="0"/>
           </a:p>
@@ -10436,7 +10436,7 @@
                 <a:ea typeface="Calibri" pitchFamily="34" charset="-122"/>
                 <a:cs typeface="Calibri" pitchFamily="34" charset="-120"/>
               </a:rPr>
-              <a:t>28.4% margin</a:t>
+              <a:t>28.8% margin</a:t>
             </a:r>
             <a:endParaRPr lang="en-US" sz="950" dirty="0"/>
           </a:p>
@@ -11122,7 +11122,7 @@
                           <a:ea typeface="Calibri" pitchFamily="34" charset="-122"/>
                           <a:cs typeface="Calibri" pitchFamily="34" charset="-120"/>
                         </a:rPr>
-                        <a:t>Enterprise value at 3.0× revenue (11× EBITDA cross-checks at ₹219 Cr)</a:t>
+                        <a:t>Enterprise value at 3.0× revenue (11× EBITDA cross-checks at ₹223 Cr)</a:t>
                       </a:r>
                       <a:endParaRPr lang="en-US" sz="1100" dirty="0">
                         <a:latin typeface="Calibri" charset="0"/>
@@ -11190,7 +11190,7 @@
                           <a:ea typeface="Calibri" pitchFamily="34" charset="-122"/>
                           <a:cs typeface="Calibri" pitchFamily="34" charset="-120"/>
                         </a:rPr>
-                        <a:t>₹210 Cr</a:t>
+                        <a:t>₹211 Cr</a:t>
                       </a:r>
                       <a:endParaRPr lang="en-US" sz="1100" dirty="0">
                         <a:latin typeface="Calibri" charset="0"/>
@@ -11328,7 +11328,7 @@
                           <a:ea typeface="Calibri" pitchFamily="34" charset="-122"/>
                           <a:cs typeface="Calibri" pitchFamily="34" charset="-120"/>
                         </a:rPr>
-                        <a:t>₹202 Cr</a:t>
+                        <a:t>₹203 Cr</a:t>
                       </a:r>
                       <a:endParaRPr lang="en-US" sz="1100" dirty="0">
                         <a:latin typeface="Calibri" charset="0"/>
@@ -11466,7 +11466,7 @@
                           <a:ea typeface="Calibri" pitchFamily="34" charset="-122"/>
                           <a:cs typeface="Calibri" pitchFamily="34" charset="-120"/>
                         </a:rPr>
-                        <a:t>₹30 Cr</a:t>
+                        <a:t>₹31 Cr</a:t>
                       </a:r>
                       <a:endParaRPr lang="en-US" sz="1100" dirty="0">
                         <a:latin typeface="Calibri" charset="0"/>
@@ -11604,7 +11604,7 @@
                           <a:ea typeface="Calibri" pitchFamily="34" charset="-122"/>
                           <a:cs typeface="Calibri" pitchFamily="34" charset="-120"/>
                         </a:rPr>
-                        <a:t>13.8%</a:t>
+                        <a:t>13.9%</a:t>
                       </a:r>
                       <a:endParaRPr lang="en-US" sz="1100" dirty="0">
                         <a:latin typeface="Calibri" charset="0"/>
@@ -11979,7 +11979,7 @@
                           <a:ea typeface="Calibri" pitchFamily="34" charset="-122"/>
                           <a:cs typeface="Calibri" pitchFamily="34" charset="-120"/>
                         </a:rPr>
-                        <a:t>18.1%</a:t>
+                        <a:t>18.0%</a:t>
                       </a:r>
                       <a:endParaRPr lang="en-US" sz="1100" dirty="0">
                         <a:latin typeface="Calibri" charset="0"/>
@@ -12047,7 +12047,7 @@
                           <a:ea typeface="Calibri" pitchFamily="34" charset="-122"/>
                           <a:cs typeface="Calibri" pitchFamily="34" charset="-120"/>
                         </a:rPr>
-                        <a:t>₹72 Cr</a:t>
+                        <a:t>₹73 Cr</a:t>
                       </a:r>
                       <a:endParaRPr lang="en-US" sz="1100" dirty="0">
                         <a:latin typeface="Calibri" charset="0"/>
@@ -12185,7 +12185,7 @@
                           <a:ea typeface="Calibri" pitchFamily="34" charset="-122"/>
                           <a:cs typeface="Calibri" pitchFamily="34" charset="-120"/>
                         </a:rPr>
-                        <a:t>21.4%</a:t>
+                        <a:t>21.3%</a:t>
                       </a:r>
                       <a:endParaRPr lang="en-US" sz="1100" dirty="0">
                         <a:latin typeface="Calibri" charset="0"/>
@@ -12391,7 +12391,7 @@
                           <a:ea typeface="Calibri" pitchFamily="34" charset="-122"/>
                           <a:cs typeface="Calibri" pitchFamily="34" charset="-120"/>
                         </a:rPr>
-                        <a:t>24.2%</a:t>
+                        <a:t>24.1%</a:t>
                       </a:r>
                       <a:endParaRPr lang="en-US" sz="1100" dirty="0">
                         <a:latin typeface="Calibri" charset="0"/>
@@ -12865,7 +12865,7 @@
                 <a:ea typeface="Calibri" pitchFamily="34" charset="-122"/>
                 <a:cs typeface="Calibri" pitchFamily="34" charset="-120"/>
               </a:rPr>
-              <a:t>At ₹90 crore pre-money an investor earns 13.8% over five years — an argument about counterparty, not valuation.</a:t>
+              <a:t>At ₹90 crore pre-money an investor earns 13.9% over five years — an argument about counterparty, not valuation.</a:t>
             </a:r>
             <a:endParaRPr lang="en-US" sz="900" dirty="0"/>
           </a:p>
@@ -13497,7 +13497,7 @@
                 <a:ea typeface="Calibri" pitchFamily="34" charset="-122"/>
                 <a:cs typeface="Calibri" pitchFamily="34" charset="-120"/>
               </a:rPr>
-              <a:t>2.44×</a:t>
+              <a:t>2.57×</a:t>
             </a:r>
             <a:endParaRPr lang="en-US" sz="2600" dirty="0"/>
           </a:p>
@@ -13688,7 +13688,7 @@
                 <a:ea typeface="Calibri" pitchFamily="34" charset="-122"/>
                 <a:cs typeface="Calibri" pitchFamily="34" charset="-120"/>
               </a:rPr>
-              <a:t>Over seven years, against ₹30 Cr for the equivalent equity</a:t>
+              <a:t>Over seven years, against ₹31 Cr for the equivalent equity</a:t>
             </a:r>
             <a:endParaRPr lang="en-US" sz="950" dirty="0"/>
           </a:p>
@@ -13838,7 +13838,7 @@
                 <a:ea typeface="Calibri" pitchFamily="34" charset="-122"/>
                 <a:cs typeface="Calibri" pitchFamily="34" charset="-120"/>
               </a:rPr>
-              <a:t>₹10 Cr collateral-free at 12.70% costs ₹5.70 Cr over seven years — against ₹30 Cr for the equivalent equity, on the company's own projections.</a:t>
+              <a:t>₹10 Cr collateral-free at 12.70% costs ₹5.70 Cr over seven years — against ₹31 Cr for the equivalent equity, on the company's own projections.</a:t>
             </a:r>
             <a:endParaRPr lang="en-US" sz="1200" dirty="0"/>
           </a:p>
@@ -14995,7 +14995,7 @@
                           <a:ea typeface="Calibri" pitchFamily="34" charset="-122"/>
                           <a:cs typeface="Calibri" pitchFamily="34" charset="-120"/>
                         </a:rPr>
-                        <a:t>21.3%</a:t>
+                        <a:t>21.4%</a:t>
                       </a:r>
                       <a:endParaRPr lang="en-US" sz="1100" dirty="0">
                         <a:latin typeface="Calibri" charset="0"/>
@@ -15133,7 +15133,7 @@
                           <a:ea typeface="Calibri" pitchFamily="34" charset="-122"/>
                           <a:cs typeface="Calibri" pitchFamily="34" charset="-120"/>
                         </a:rPr>
-                        <a:t>2.43×</a:t>
+                        <a:t>2.44×</a:t>
                       </a:r>
                       <a:endParaRPr lang="en-US" sz="1100" dirty="0">
                         <a:latin typeface="Calibri" charset="0"/>
@@ -15333,7 +15333,7 @@
                 <a:ea typeface="Calibri" pitchFamily="34" charset="-122"/>
                 <a:cs typeface="Calibri" pitchFamily="34" charset="-120"/>
               </a:rPr>
-              <a:t>21.3% against 13.8% for straight equity at the same valuation and exit. Dilution is deferred three years, and 13.0% converted at ₹92 Cr is cheaper than 15.1% sold today at ₹90 crore pre-money.</a:t>
+              <a:t>21.4% against 13.9% for straight equity at the same valuation and exit. Dilution is deferred three years, and 13.0% converted at ₹92 Cr is cheaper than 15.1% sold today at ₹90 crore pre-money.</a:t>
             </a:r>
             <a:endParaRPr lang="en-US" sz="1200" dirty="0"/>
           </a:p>
@@ -15675,7 +15675,7 @@
                 <a:ea typeface="Calibri" pitchFamily="34" charset="-122"/>
                 <a:cs typeface="Calibri" pitchFamily="34" charset="-120"/>
               </a:rPr>
-              <a:t>13.8%</a:t>
+              <a:t>13.9%</a:t>
             </a:r>
             <a:endParaRPr lang="en-US" sz="3000" dirty="0"/>
           </a:p>
@@ -16008,7 +16008,7 @@
                 <a:ea typeface="Calibri" pitchFamily="34" charset="-122"/>
                 <a:cs typeface="Calibri" pitchFamily="34" charset="-120"/>
               </a:rPr>
-              <a:t>₹30 Cr</a:t>
+              <a:t>₹31 Cr</a:t>
             </a:r>
             <a:endParaRPr lang="en-US" sz="950" dirty="0"/>
           </a:p>
@@ -16825,7 +16825,7 @@
                 <a:ea typeface="Calibri" pitchFamily="34" charset="-122"/>
                 <a:cs typeface="Calibri" pitchFamily="34" charset="-120"/>
               </a:rPr>
-              <a:t>21.3%</a:t>
+              <a:t>21.4%</a:t>
             </a:r>
             <a:endParaRPr lang="en-US" sz="3000" dirty="0"/>
           </a:p>

--- a/pptx/EOD-Company-Capital-Structure.pptx
+++ b/pptx/EOD-Company-Capital-Structure.pptx
@@ -116,7 +116,7 @@
 </p:presentation>
 </file>
 
-<file path=ppt/charts/chart17.xml><?xml version="1.0" encoding="utf-8"?>
+<file path=ppt/charts/chart14.xml><?xml version="1.0" encoding="utf-8"?>
 <c:chartSpace xmlns:c="http://schemas.openxmlformats.org/drawingml/2006/chart" xmlns:a="http://schemas.openxmlformats.org/drawingml/2006/main" xmlns:r="http://schemas.openxmlformats.org/officeDocument/2006/relationships">
   <c:date1904 val="0"/>
   <c:roundedCorners val="1"/>
@@ -443,7 +443,7 @@
 </c:chartSpace>
 </file>
 
-<file path=ppt/charts/chart18.xml><?xml version="1.0" encoding="utf-8"?>
+<file path=ppt/charts/chart15.xml><?xml version="1.0" encoding="utf-8"?>
 <c:chartSpace xmlns:c="http://schemas.openxmlformats.org/drawingml/2006/chart" xmlns:a="http://schemas.openxmlformats.org/drawingml/2006/main" xmlns:r="http://schemas.openxmlformats.org/officeDocument/2006/relationships">
   <c:date1904 val="0"/>
   <c:roundedCorners val="1"/>
@@ -1038,7 +1038,7 @@
 </c:chartSpace>
 </file>
 
-<file path=ppt/charts/chart19.xml><?xml version="1.0" encoding="utf-8"?>
+<file path=ppt/charts/chart16.xml><?xml version="1.0" encoding="utf-8"?>
 <c:chartSpace xmlns:c="http://schemas.openxmlformats.org/drawingml/2006/chart" xmlns:a="http://schemas.openxmlformats.org/drawingml/2006/main" xmlns:r="http://schemas.openxmlformats.org/officeDocument/2006/relationships">
   <c:date1904 val="0"/>
   <c:roundedCorners val="1"/>

--- a/pptx/EOD-Company-Capital-Structure.pptx
+++ b/pptx/EOD-Company-Capital-Structure.pptx
@@ -629,19 +629,19 @@
                 <c:formatCode>General</c:formatCode>
                 <c:ptCount val="5"/>
                 <c:pt idx="0">
-                  <c:v>1.24</c:v>
+                  <c:v>1.17</c:v>
                 </c:pt>
                 <c:pt idx="1">
-                  <c:v>2.81</c:v>
+                  <c:v>2.61</c:v>
                 </c:pt>
                 <c:pt idx="2">
-                  <c:v>3.44</c:v>
+                  <c:v>3.14</c:v>
                 </c:pt>
                 <c:pt idx="3">
-                  <c:v>3.99</c:v>
+                  <c:v>3.59</c:v>
                 </c:pt>
                 <c:pt idx="4">
-                  <c:v>4.48</c:v>
+                  <c:v>4</c:v>
                 </c:pt>
               </c:numCache>
             </c:numRef>
@@ -1347,25 +1347,25 @@
                 <c:formatCode>General</c:formatCode>
                 <c:ptCount val="7"/>
                 <c:pt idx="0">
-                  <c:v>5.58</c:v>
+                  <c:v>5.57</c:v>
                 </c:pt>
                 <c:pt idx="1">
-                  <c:v>7.54</c:v>
+                  <c:v>7.48</c:v>
                 </c:pt>
                 <c:pt idx="2">
-                  <c:v>13.37</c:v>
+                  <c:v>13.25</c:v>
                 </c:pt>
                 <c:pt idx="3">
-                  <c:v>17.08</c:v>
+                  <c:v>16.91</c:v>
                 </c:pt>
                 <c:pt idx="4">
-                  <c:v>20.24</c:v>
+                  <c:v>20.03</c:v>
                 </c:pt>
                 <c:pt idx="5">
-                  <c:v>21.46</c:v>
+                  <c:v>21.24</c:v>
                 </c:pt>
                 <c:pt idx="6">
-                  <c:v>22.67</c:v>
+                  <c:v>22.44</c:v>
                 </c:pt>
               </c:numCache>
             </c:numRef>
@@ -3239,7 +3239,7 @@
         <p:spPr>
           <a:xfrm>
             <a:off x="566928" y="2706624"/>
-            <a:ext cx="10241280" cy="607568"/>
+            <a:ext cx="10241280" cy="911352"/>
           </a:xfrm>
           <a:prstGeom prst="rect">
             <a:avLst/>
@@ -3280,7 +3280,7 @@
         </p:nvSpPr>
         <p:spPr>
           <a:xfrm>
-            <a:off x="566928" y="3460496"/>
+            <a:off x="566928" y="3764280"/>
             <a:ext cx="10241280" cy="694944"/>
           </a:xfrm>
           <a:prstGeom prst="rect">
@@ -3546,7 +3546,7 @@
                 <a:ea typeface="Calibri" pitchFamily="34" charset="-122"/>
                 <a:cs typeface="Calibri" pitchFamily="34" charset="-120"/>
               </a:rPr>
-              <a:t>13.9%</a:t>
+              <a:t>13.7%</a:t>
             </a:r>
             <a:endParaRPr lang="en-US" sz="2900" dirty="0"/>
           </a:p>
@@ -6788,7 +6788,7 @@
         <p:spPr>
           <a:xfrm>
             <a:off x="566928" y="950976"/>
-            <a:ext cx="11057839" cy="231140"/>
+            <a:ext cx="11057839" cy="462280"/>
           </a:xfrm>
           <a:prstGeom prst="rect">
             <a:avLst/>
@@ -6829,7 +6829,7 @@
         </p:nvSpPr>
         <p:spPr>
           <a:xfrm>
-            <a:off x="566928" y="1310132"/>
+            <a:off x="566928" y="1541272"/>
             <a:ext cx="3539642" cy="1170432"/>
           </a:xfrm>
           <a:prstGeom prst="roundRect">
@@ -6856,7 +6856,7 @@
         </p:nvSpPr>
         <p:spPr>
           <a:xfrm>
-            <a:off x="749808" y="1429004"/>
+            <a:off x="749808" y="1660144"/>
             <a:ext cx="3173882" cy="237744"/>
           </a:xfrm>
           <a:prstGeom prst="rect">
@@ -6895,7 +6895,7 @@
         </p:nvSpPr>
         <p:spPr>
           <a:xfrm>
-            <a:off x="749808" y="1675892"/>
+            <a:off x="749808" y="1907032"/>
             <a:ext cx="3173882" cy="457200"/>
           </a:xfrm>
           <a:prstGeom prst="rect">
@@ -6936,7 +6936,7 @@
         </p:nvSpPr>
         <p:spPr>
           <a:xfrm>
-            <a:off x="749808" y="2151380"/>
+            <a:off x="749808" y="2382520"/>
             <a:ext cx="3173882" cy="256032"/>
           </a:xfrm>
           <a:prstGeom prst="rect">
@@ -6978,7 +6978,7 @@
         </p:nvSpPr>
         <p:spPr>
           <a:xfrm>
-            <a:off x="4326026" y="1310132"/>
+            <a:off x="4326026" y="1541272"/>
             <a:ext cx="3539642" cy="1170432"/>
           </a:xfrm>
           <a:prstGeom prst="roundRect">
@@ -7005,7 +7005,7 @@
         </p:nvSpPr>
         <p:spPr>
           <a:xfrm>
-            <a:off x="4508906" y="1429004"/>
+            <a:off x="4508906" y="1660144"/>
             <a:ext cx="3173882" cy="237744"/>
           </a:xfrm>
           <a:prstGeom prst="rect">
@@ -7044,7 +7044,7 @@
         </p:nvSpPr>
         <p:spPr>
           <a:xfrm>
-            <a:off x="4508906" y="1675892"/>
+            <a:off x="4508906" y="1907032"/>
             <a:ext cx="3173882" cy="457200"/>
           </a:xfrm>
           <a:prstGeom prst="rect">
@@ -7085,7 +7085,7 @@
         </p:nvSpPr>
         <p:spPr>
           <a:xfrm>
-            <a:off x="4508906" y="2151380"/>
+            <a:off x="4508906" y="2382520"/>
             <a:ext cx="3173882" cy="256032"/>
           </a:xfrm>
           <a:prstGeom prst="rect">
@@ -7127,7 +7127,7 @@
         </p:nvSpPr>
         <p:spPr>
           <a:xfrm>
-            <a:off x="8085125" y="1310132"/>
+            <a:off x="8085125" y="1541272"/>
             <a:ext cx="3539642" cy="1170432"/>
           </a:xfrm>
           <a:prstGeom prst="roundRect">
@@ -7154,7 +7154,7 @@
         </p:nvSpPr>
         <p:spPr>
           <a:xfrm>
-            <a:off x="8268005" y="1429004"/>
+            <a:off x="8268005" y="1660144"/>
             <a:ext cx="3173882" cy="237744"/>
           </a:xfrm>
           <a:prstGeom prst="rect">
@@ -7193,7 +7193,7 @@
         </p:nvSpPr>
         <p:spPr>
           <a:xfrm>
-            <a:off x="8268005" y="1675892"/>
+            <a:off x="8268005" y="1907032"/>
             <a:ext cx="3173882" cy="457200"/>
           </a:xfrm>
           <a:prstGeom prst="rect">
@@ -7234,7 +7234,7 @@
         </p:nvSpPr>
         <p:spPr>
           <a:xfrm>
-            <a:off x="8268005" y="2151380"/>
+            <a:off x="8268005" y="2382520"/>
             <a:ext cx="3173882" cy="256032"/>
           </a:xfrm>
           <a:prstGeom prst="rect">
@@ -7283,7 +7283,7 @@
           </p:nvPr>
         </p:nvGraphicFramePr>
         <p:xfrm>
-          <a:off x="566928" y="2718308"/>
+          <a:off x="566928" y="2949448"/>
           <a:ext cx="11057839" cy="914400"/>
         </p:xfrm>
         <a:graphic>
@@ -7996,7 +7996,7 @@
         </p:nvSpPr>
         <p:spPr>
           <a:xfrm>
-            <a:off x="566928" y="4344416"/>
+            <a:off x="566928" y="4575556"/>
             <a:ext cx="11057839" cy="1512428"/>
           </a:xfrm>
           <a:prstGeom prst="roundRect">
@@ -8023,7 +8023,7 @@
         </p:nvSpPr>
         <p:spPr>
           <a:xfrm>
-            <a:off x="804672" y="4454144"/>
+            <a:off x="804672" y="4685284"/>
             <a:ext cx="2743200" cy="182880"/>
           </a:xfrm>
           <a:prstGeom prst="rect">
@@ -8062,7 +8062,7 @@
         </p:nvSpPr>
         <p:spPr>
           <a:xfrm>
-            <a:off x="804672" y="4637024"/>
+            <a:off x="804672" y="4868164"/>
             <a:ext cx="10582351" cy="288595"/>
           </a:xfrm>
           <a:prstGeom prst="rect">
@@ -8104,7 +8104,7 @@
         </p:nvSpPr>
         <p:spPr>
           <a:xfrm>
-            <a:off x="804672" y="4980483"/>
+            <a:off x="804672" y="5211623"/>
             <a:ext cx="10582351" cy="803209"/>
           </a:xfrm>
           <a:prstGeom prst="rect">
@@ -10436,7 +10436,7 @@
                 <a:ea typeface="Calibri" pitchFamily="34" charset="-122"/>
                 <a:cs typeface="Calibri" pitchFamily="34" charset="-120"/>
               </a:rPr>
-              <a:t>28.8% margin</a:t>
+              <a:t>28.7% margin</a:t>
             </a:r>
             <a:endParaRPr lang="en-US" sz="950" dirty="0"/>
           </a:p>
@@ -11122,7 +11122,7 @@
                           <a:ea typeface="Calibri" pitchFamily="34" charset="-122"/>
                           <a:cs typeface="Calibri" pitchFamily="34" charset="-120"/>
                         </a:rPr>
-                        <a:t>Enterprise value at 3.0× revenue (11× EBITDA cross-checks at ₹223 Cr)</a:t>
+                        <a:t>Enterprise value at 3.0× revenue (11× EBITDA cross-checks at ₹220 Cr)</a:t>
                       </a:r>
                       <a:endParaRPr lang="en-US" sz="1100" dirty="0">
                         <a:latin typeface="Calibri" charset="0"/>
@@ -11190,7 +11190,7 @@
                           <a:ea typeface="Calibri" pitchFamily="34" charset="-122"/>
                           <a:cs typeface="Calibri" pitchFamily="34" charset="-120"/>
                         </a:rPr>
-                        <a:t>₹211 Cr</a:t>
+                        <a:t>₹209 Cr</a:t>
                       </a:r>
                       <a:endParaRPr lang="en-US" sz="1100" dirty="0">
                         <a:latin typeface="Calibri" charset="0"/>
@@ -11328,7 +11328,7 @@
                           <a:ea typeface="Calibri" pitchFamily="34" charset="-122"/>
                           <a:cs typeface="Calibri" pitchFamily="34" charset="-120"/>
                         </a:rPr>
-                        <a:t>₹203 Cr</a:t>
+                        <a:t>₹201 Cr</a:t>
                       </a:r>
                       <a:endParaRPr lang="en-US" sz="1100" dirty="0">
                         <a:latin typeface="Calibri" charset="0"/>
@@ -11466,7 +11466,7 @@
                           <a:ea typeface="Calibri" pitchFamily="34" charset="-122"/>
                           <a:cs typeface="Calibri" pitchFamily="34" charset="-120"/>
                         </a:rPr>
-                        <a:t>₹31 Cr</a:t>
+                        <a:t>₹30 Cr</a:t>
                       </a:r>
                       <a:endParaRPr lang="en-US" sz="1100" dirty="0">
                         <a:latin typeface="Calibri" charset="0"/>
@@ -11604,7 +11604,7 @@
                           <a:ea typeface="Calibri" pitchFamily="34" charset="-122"/>
                           <a:cs typeface="Calibri" pitchFamily="34" charset="-120"/>
                         </a:rPr>
-                        <a:t>13.9%</a:t>
+                        <a:t>13.7%</a:t>
                       </a:r>
                       <a:endParaRPr lang="en-US" sz="1100" dirty="0">
                         <a:latin typeface="Calibri" charset="0"/>
@@ -11979,7 +11979,7 @@
                           <a:ea typeface="Calibri" pitchFamily="34" charset="-122"/>
                           <a:cs typeface="Calibri" pitchFamily="34" charset="-120"/>
                         </a:rPr>
-                        <a:t>18.0%</a:t>
+                        <a:t>18.2%</a:t>
                       </a:r>
                       <a:endParaRPr lang="en-US" sz="1100" dirty="0">
                         <a:latin typeface="Calibri" charset="0"/>
@@ -12047,7 +12047,7 @@
                           <a:ea typeface="Calibri" pitchFamily="34" charset="-122"/>
                           <a:cs typeface="Calibri" pitchFamily="34" charset="-120"/>
                         </a:rPr>
-                        <a:t>₹73 Cr</a:t>
+                        <a:t>₹72 Cr</a:t>
                       </a:r>
                       <a:endParaRPr lang="en-US" sz="1100" dirty="0">
                         <a:latin typeface="Calibri" charset="0"/>
@@ -12185,7 +12185,7 @@
                           <a:ea typeface="Calibri" pitchFamily="34" charset="-122"/>
                           <a:cs typeface="Calibri" pitchFamily="34" charset="-120"/>
                         </a:rPr>
-                        <a:t>21.3%</a:t>
+                        <a:t>21.5%</a:t>
                       </a:r>
                       <a:endParaRPr lang="en-US" sz="1100" dirty="0">
                         <a:latin typeface="Calibri" charset="0"/>
@@ -12391,7 +12391,7 @@
                           <a:ea typeface="Calibri" pitchFamily="34" charset="-122"/>
                           <a:cs typeface="Calibri" pitchFamily="34" charset="-120"/>
                         </a:rPr>
-                        <a:t>24.1%</a:t>
+                        <a:t>24.2%</a:t>
                       </a:r>
                       <a:endParaRPr lang="en-US" sz="1100" dirty="0">
                         <a:latin typeface="Calibri" charset="0"/>
@@ -12865,7 +12865,7 @@
                 <a:ea typeface="Calibri" pitchFamily="34" charset="-122"/>
                 <a:cs typeface="Calibri" pitchFamily="34" charset="-120"/>
               </a:rPr>
-              <a:t>At ₹90 crore pre-money an investor earns 13.9% over five years — an argument about counterparty, not valuation.</a:t>
+              <a:t>At ₹90 crore pre-money an investor earns 13.7% over five years — an argument about counterparty, not valuation.</a:t>
             </a:r>
             <a:endParaRPr lang="en-US" sz="900" dirty="0"/>
           </a:p>
@@ -13049,7 +13049,7 @@
         <p:spPr>
           <a:xfrm>
             <a:off x="566928" y="950976"/>
-            <a:ext cx="11057839" cy="231140"/>
+            <a:ext cx="11057839" cy="462280"/>
           </a:xfrm>
           <a:prstGeom prst="rect">
             <a:avLst/>
@@ -13089,7 +13089,7 @@
           <p:nvPr/>
         </p:nvGraphicFramePr>
         <p:xfrm>
-          <a:off x="566928" y="1310132"/>
+          <a:off x="566928" y="1541272"/>
           <a:ext cx="11057839" cy="2194560"/>
         </p:xfrm>
         <a:graphic xmlns:a="http://schemas.openxmlformats.org/drawingml/2006/main">
@@ -13106,7 +13106,7 @@
         </p:nvSpPr>
         <p:spPr>
           <a:xfrm>
-            <a:off x="566928" y="3705860"/>
+            <a:off x="566928" y="3937000"/>
             <a:ext cx="2599868" cy="1207008"/>
           </a:xfrm>
           <a:prstGeom prst="roundRect">
@@ -13133,7 +13133,7 @@
         </p:nvSpPr>
         <p:spPr>
           <a:xfrm>
-            <a:off x="749808" y="3824732"/>
+            <a:off x="749808" y="4055872"/>
             <a:ext cx="2234108" cy="237744"/>
           </a:xfrm>
           <a:prstGeom prst="rect">
@@ -13172,7 +13172,7 @@
         </p:nvSpPr>
         <p:spPr>
           <a:xfrm>
-            <a:off x="749808" y="4071620"/>
+            <a:off x="749808" y="4302760"/>
             <a:ext cx="2234108" cy="457200"/>
           </a:xfrm>
           <a:prstGeom prst="rect">
@@ -13213,7 +13213,7 @@
         </p:nvSpPr>
         <p:spPr>
           <a:xfrm>
-            <a:off x="749808" y="4547108"/>
+            <a:off x="749808" y="4778248"/>
             <a:ext cx="2234108" cy="292608"/>
           </a:xfrm>
           <a:prstGeom prst="rect">
@@ -13255,7 +13255,7 @@
         </p:nvSpPr>
         <p:spPr>
           <a:xfrm>
-            <a:off x="3386252" y="3705860"/>
+            <a:off x="3386252" y="3937000"/>
             <a:ext cx="2599868" cy="1207008"/>
           </a:xfrm>
           <a:prstGeom prst="roundRect">
@@ -13282,7 +13282,7 @@
         </p:nvSpPr>
         <p:spPr>
           <a:xfrm>
-            <a:off x="3569132" y="3824732"/>
+            <a:off x="3569132" y="4055872"/>
             <a:ext cx="2234108" cy="237744"/>
           </a:xfrm>
           <a:prstGeom prst="rect">
@@ -13321,7 +13321,7 @@
         </p:nvSpPr>
         <p:spPr>
           <a:xfrm>
-            <a:off x="3569132" y="4071620"/>
+            <a:off x="3569132" y="4302760"/>
             <a:ext cx="2234108" cy="457200"/>
           </a:xfrm>
           <a:prstGeom prst="rect">
@@ -13362,7 +13362,7 @@
         </p:nvSpPr>
         <p:spPr>
           <a:xfrm>
-            <a:off x="3569132" y="4547108"/>
+            <a:off x="3569132" y="4778248"/>
             <a:ext cx="2234108" cy="292608"/>
           </a:xfrm>
           <a:prstGeom prst="rect">
@@ -13404,7 +13404,7 @@
         </p:nvSpPr>
         <p:spPr>
           <a:xfrm>
-            <a:off x="6205576" y="3705860"/>
+            <a:off x="6205576" y="3937000"/>
             <a:ext cx="2599868" cy="1207008"/>
           </a:xfrm>
           <a:prstGeom prst="roundRect">
@@ -13431,7 +13431,7 @@
         </p:nvSpPr>
         <p:spPr>
           <a:xfrm>
-            <a:off x="6388456" y="3824732"/>
+            <a:off x="6388456" y="4055872"/>
             <a:ext cx="2234108" cy="237744"/>
           </a:xfrm>
           <a:prstGeom prst="rect">
@@ -13470,7 +13470,7 @@
         </p:nvSpPr>
         <p:spPr>
           <a:xfrm>
-            <a:off x="6388456" y="4071620"/>
+            <a:off x="6388456" y="4302760"/>
             <a:ext cx="2234108" cy="457200"/>
           </a:xfrm>
           <a:prstGeom prst="rect">
@@ -13497,7 +13497,7 @@
                 <a:ea typeface="Calibri" pitchFamily="34" charset="-122"/>
                 <a:cs typeface="Calibri" pitchFamily="34" charset="-120"/>
               </a:rPr>
-              <a:t>2.57×</a:t>
+              <a:t>2.55×</a:t>
             </a:r>
             <a:endParaRPr lang="en-US" sz="2600" dirty="0"/>
           </a:p>
@@ -13511,7 +13511,7 @@
         </p:nvSpPr>
         <p:spPr>
           <a:xfrm>
-            <a:off x="6388456" y="4547108"/>
+            <a:off x="6388456" y="4778248"/>
             <a:ext cx="2234108" cy="292608"/>
           </a:xfrm>
           <a:prstGeom prst="rect">
@@ -13553,7 +13553,7 @@
         </p:nvSpPr>
         <p:spPr>
           <a:xfrm>
-            <a:off x="9024899" y="3705860"/>
+            <a:off x="9024899" y="3937000"/>
             <a:ext cx="2599868" cy="1207008"/>
           </a:xfrm>
           <a:prstGeom prst="roundRect">
@@ -13580,7 +13580,7 @@
         </p:nvSpPr>
         <p:spPr>
           <a:xfrm>
-            <a:off x="9207779" y="3824732"/>
+            <a:off x="9207779" y="4055872"/>
             <a:ext cx="2234108" cy="237744"/>
           </a:xfrm>
           <a:prstGeom prst="rect">
@@ -13619,7 +13619,7 @@
         </p:nvSpPr>
         <p:spPr>
           <a:xfrm>
-            <a:off x="9207779" y="4071620"/>
+            <a:off x="9207779" y="4302760"/>
             <a:ext cx="2234108" cy="457200"/>
           </a:xfrm>
           <a:prstGeom prst="rect">
@@ -13660,7 +13660,7 @@
         </p:nvSpPr>
         <p:spPr>
           <a:xfrm>
-            <a:off x="9207779" y="4547108"/>
+            <a:off x="9207779" y="4778248"/>
             <a:ext cx="2234108" cy="292608"/>
           </a:xfrm>
           <a:prstGeom prst="rect">
@@ -13688,7 +13688,7 @@
                 <a:ea typeface="Calibri" pitchFamily="34" charset="-122"/>
                 <a:cs typeface="Calibri" pitchFamily="34" charset="-120"/>
               </a:rPr>
-              <a:t>Over seven years, against ₹31 Cr for the equivalent equity</a:t>
+              <a:t>Over seven years, against ₹30 Cr for the equivalent equity</a:t>
             </a:r>
             <a:endParaRPr lang="en-US" sz="950" dirty="0"/>
           </a:p>
@@ -13702,12 +13702,12 @@
         </p:nvSpPr>
         <p:spPr>
           <a:xfrm>
-            <a:off x="566928" y="5168900"/>
-            <a:ext cx="11057839" cy="1062299"/>
+            <a:off x="566928" y="5400040"/>
+            <a:ext cx="11057839" cy="954654"/>
           </a:xfrm>
           <a:prstGeom prst="roundRect">
             <a:avLst>
-              <a:gd name="adj" fmla="val 4304"/>
+              <a:gd name="adj" fmla="val 4789"/>
             </a:avLst>
           </a:prstGeom>
           <a:solidFill>
@@ -13729,7 +13729,7 @@
         </p:nvSpPr>
         <p:spPr>
           <a:xfrm>
-            <a:off x="804672" y="5278628"/>
+            <a:off x="804672" y="5509768"/>
             <a:ext cx="2743200" cy="182880"/>
           </a:xfrm>
           <a:prstGeom prst="rect">
@@ -13768,8 +13768,8 @@
         </p:nvSpPr>
         <p:spPr>
           <a:xfrm>
-            <a:off x="804672" y="5461508"/>
-            <a:ext cx="10582351" cy="288595"/>
+            <a:off x="804672" y="5692648"/>
+            <a:ext cx="10582351" cy="227838"/>
           </a:xfrm>
           <a:prstGeom prst="rect">
             <a:avLst/>
@@ -13783,12 +13783,12 @@
           <a:p>
             <a:pPr indent="0" marL="0">
               <a:lnSpc>
-                <a:spcPts val="2185"/>
+                <a:spcPts val="1725"/>
               </a:lnSpc>
               <a:buNone/>
             </a:pPr>
             <a:r>
-              <a:rPr lang="en-US" sz="1900" b="1" dirty="0">
+              <a:rPr lang="en-US" sz="1500" b="1" dirty="0">
                 <a:solidFill>
                   <a:srgbClr val="0A1426"/>
                 </a:solidFill>
@@ -13798,7 +13798,7 @@
               </a:rPr>
               <a:t>The debt is roughly a fifth of the cost of the equity</a:t>
             </a:r>
-            <a:endParaRPr lang="en-US" sz="1900" dirty="0"/>
+            <a:endParaRPr lang="en-US" sz="1500" dirty="0"/>
           </a:p>
         </p:txBody>
       </p:sp>
@@ -13810,8 +13810,8 @@
         </p:nvSpPr>
         <p:spPr>
           <a:xfrm>
-            <a:off x="804672" y="5804967"/>
-            <a:ext cx="10582351" cy="353080"/>
+            <a:off x="804672" y="5975350"/>
+            <a:ext cx="10582351" cy="306192"/>
           </a:xfrm>
           <a:prstGeom prst="rect">
             <a:avLst/>
@@ -13825,12 +13825,12 @@
           <a:p>
             <a:pPr indent="0" marL="0">
               <a:lnSpc>
-                <a:spcPts val="1704"/>
+                <a:spcPts val="1349"/>
               </a:lnSpc>
               <a:buNone/>
             </a:pPr>
             <a:r>
-              <a:rPr lang="en-US" sz="1200" dirty="0">
+              <a:rPr lang="en-US" sz="950" dirty="0">
                 <a:solidFill>
                   <a:srgbClr val="3B4660"/>
                 </a:solidFill>
@@ -13838,9 +13838,9 @@
                 <a:ea typeface="Calibri" pitchFamily="34" charset="-122"/>
                 <a:cs typeface="Calibri" pitchFamily="34" charset="-120"/>
               </a:rPr>
-              <a:t>₹10 Cr collateral-free at 12.70% costs ₹5.70 Cr over seven years — against ₹31 Cr for the equivalent equity, on the company's own projections.</a:t>
+              <a:t>₹10 Cr collateral-free at 12.70% costs ₹5.70 Cr over seven years — against ₹30 Cr for the equivalent equity, on the company's own projections.</a:t>
             </a:r>
-            <a:endParaRPr lang="en-US" sz="1200" dirty="0"/>
+            <a:endParaRPr lang="en-US" sz="950" dirty="0"/>
           </a:p>
         </p:txBody>
       </p:sp>
@@ -14995,7 +14995,7 @@
                           <a:ea typeface="Calibri" pitchFamily="34" charset="-122"/>
                           <a:cs typeface="Calibri" pitchFamily="34" charset="-120"/>
                         </a:rPr>
-                        <a:t>21.4%</a:t>
+                        <a:t>21.2%</a:t>
                       </a:r>
                       <a:endParaRPr lang="en-US" sz="1100" dirty="0">
                         <a:latin typeface="Calibri" charset="0"/>
@@ -15133,7 +15133,7 @@
                           <a:ea typeface="Calibri" pitchFamily="34" charset="-122"/>
                           <a:cs typeface="Calibri" pitchFamily="34" charset="-120"/>
                         </a:rPr>
-                        <a:t>2.44×</a:t>
+                        <a:t>2.42×</a:t>
                       </a:r>
                       <a:endParaRPr lang="en-US" sz="1100" dirty="0">
                         <a:latin typeface="Calibri" charset="0"/>
@@ -15333,7 +15333,7 @@
                 <a:ea typeface="Calibri" pitchFamily="34" charset="-122"/>
                 <a:cs typeface="Calibri" pitchFamily="34" charset="-120"/>
               </a:rPr>
-              <a:t>21.4% against 13.9% for straight equity at the same valuation and exit. Dilution is deferred three years, and 13.0% converted at ₹92 Cr is cheaper than 15.1% sold today at ₹90 crore pre-money.</a:t>
+              <a:t>21.2% against 13.7% for straight equity at the same valuation and exit. Dilution is deferred three years, and 13.0% converted at ₹92 Cr is cheaper than 15.1% sold today at ₹90 crore pre-money.</a:t>
             </a:r>
             <a:endParaRPr lang="en-US" sz="1200" dirty="0"/>
           </a:p>
@@ -15675,7 +15675,7 @@
                 <a:ea typeface="Calibri" pitchFamily="34" charset="-122"/>
                 <a:cs typeface="Calibri" pitchFamily="34" charset="-120"/>
               </a:rPr>
-              <a:t>13.9%</a:t>
+              <a:t>13.7%</a:t>
             </a:r>
             <a:endParaRPr lang="en-US" sz="3000" dirty="0"/>
           </a:p>
@@ -16008,7 +16008,7 @@
                 <a:ea typeface="Calibri" pitchFamily="34" charset="-122"/>
                 <a:cs typeface="Calibri" pitchFamily="34" charset="-120"/>
               </a:rPr>
-              <a:t>₹31 Cr</a:t>
+              <a:t>₹30 Cr</a:t>
             </a:r>
             <a:endParaRPr lang="en-US" sz="950" dirty="0"/>
           </a:p>
@@ -16825,7 +16825,7 @@
                 <a:ea typeface="Calibri" pitchFamily="34" charset="-122"/>
                 <a:cs typeface="Calibri" pitchFamily="34" charset="-120"/>
               </a:rPr>
-              <a:t>21.4%</a:t>
+              <a:t>21.2%</a:t>
             </a:r>
             <a:endParaRPr lang="en-US" sz="3000" dirty="0"/>
           </a:p>
@@ -17271,11 +17271,11 @@
         <p:spPr>
           <a:xfrm>
             <a:off x="566928" y="4169664"/>
-            <a:ext cx="11057839" cy="1536192"/>
+            <a:ext cx="11057839" cy="1737492"/>
           </a:xfrm>
           <a:prstGeom prst="roundRect">
             <a:avLst>
-              <a:gd name="adj" fmla="val 2976"/>
+              <a:gd name="adj" fmla="val 2631"/>
             </a:avLst>
           </a:prstGeom>
           <a:solidFill>
@@ -17379,7 +17379,7 @@
         <p:spPr>
           <a:xfrm>
             <a:off x="804672" y="4805731"/>
-            <a:ext cx="10582351" cy="826973"/>
+            <a:ext cx="10582351" cy="1028273"/>
           </a:xfrm>
           <a:prstGeom prst="rect">
             <a:avLst/>

--- a/pptx/EOD-Company-Capital-Structure.pptx
+++ b/pptx/EOD-Company-Capital-Structure.pptx
@@ -632,16 +632,16 @@
                   <c:v>1.17</c:v>
                 </c:pt>
                 <c:pt idx="1">
-                  <c:v>2.61</c:v>
+                  <c:v>2.64</c:v>
                 </c:pt>
                 <c:pt idx="2">
-                  <c:v>3.14</c:v>
+                  <c:v>3.23</c:v>
                 </c:pt>
                 <c:pt idx="3">
-                  <c:v>3.59</c:v>
+                  <c:v>4.03</c:v>
                 </c:pt>
                 <c:pt idx="4">
-                  <c:v>4</c:v>
+                  <c:v>4.88</c:v>
                 </c:pt>
               </c:numCache>
             </c:numRef>
@@ -1347,25 +1347,25 @@
                 <c:formatCode>General</c:formatCode>
                 <c:ptCount val="7"/>
                 <c:pt idx="0">
-                  <c:v>5.57</c:v>
+                  <c:v>5.51</c:v>
                 </c:pt>
                 <c:pt idx="1">
-                  <c:v>7.48</c:v>
+                  <c:v>7.38</c:v>
                 </c:pt>
                 <c:pt idx="2">
-                  <c:v>13.25</c:v>
+                  <c:v>13.18</c:v>
                 </c:pt>
                 <c:pt idx="3">
-                  <c:v>16.91</c:v>
+                  <c:v>17.07</c:v>
                 </c:pt>
                 <c:pt idx="4">
-                  <c:v>20.03</c:v>
+                  <c:v>20.49</c:v>
                 </c:pt>
                 <c:pt idx="5">
-                  <c:v>21.24</c:v>
+                  <c:v>21.72</c:v>
                 </c:pt>
                 <c:pt idx="6">
-                  <c:v>22.44</c:v>
+                  <c:v>22.95</c:v>
                 </c:pt>
               </c:numCache>
             </c:numRef>
@@ -3426,7 +3426,7 @@
                 <a:ea typeface="Calibri" pitchFamily="34" charset="-122"/>
                 <a:cs typeface="Calibri" pitchFamily="34" charset="-120"/>
               </a:rPr>
-              <a:t>₹70 Cr</a:t>
+              <a:t>₹71 Cr</a:t>
             </a:r>
             <a:endParaRPr lang="en-US" sz="2900" dirty="0"/>
           </a:p>
@@ -3546,7 +3546,7 @@
                 <a:ea typeface="Calibri" pitchFamily="34" charset="-122"/>
                 <a:cs typeface="Calibri" pitchFamily="34" charset="-120"/>
               </a:rPr>
-              <a:t>13.7%</a:t>
+              <a:t>14.0%</a:t>
             </a:r>
             <a:endParaRPr lang="en-US" sz="2900" dirty="0"/>
           </a:p>
@@ -10245,7 +10245,7 @@
                 <a:ea typeface="Calibri" pitchFamily="34" charset="-122"/>
                 <a:cs typeface="Calibri" pitchFamily="34" charset="-120"/>
               </a:rPr>
-              <a:t>₹70 Cr</a:t>
+              <a:t>₹71 Cr</a:t>
             </a:r>
             <a:endParaRPr lang="en-US" sz="2600" dirty="0"/>
           </a:p>
@@ -10436,7 +10436,7 @@
                 <a:ea typeface="Calibri" pitchFamily="34" charset="-122"/>
                 <a:cs typeface="Calibri" pitchFamily="34" charset="-120"/>
               </a:rPr>
-              <a:t>28.7% margin</a:t>
+              <a:t>29.0% margin</a:t>
             </a:r>
             <a:endParaRPr lang="en-US" sz="950" dirty="0"/>
           </a:p>
@@ -10543,7 +10543,7 @@
                 <a:ea typeface="Calibri" pitchFamily="34" charset="-122"/>
                 <a:cs typeface="Calibri" pitchFamily="34" charset="-120"/>
               </a:rPr>
-              <a:t>17%</a:t>
+              <a:t>18%</a:t>
             </a:r>
             <a:endParaRPr lang="en-US" sz="2600" dirty="0"/>
           </a:p>
@@ -11052,7 +11052,7 @@
                           <a:ea typeface="Calibri" pitchFamily="34" charset="-122"/>
                           <a:cs typeface="Calibri" pitchFamily="34" charset="-120"/>
                         </a:rPr>
-                        <a:t>₹70 Cr</a:t>
+                        <a:t>₹71 Cr</a:t>
                       </a:r>
                       <a:endParaRPr lang="en-US" sz="1100" dirty="0">
                         <a:latin typeface="Calibri" charset="0"/>
@@ -11122,7 +11122,7 @@
                           <a:ea typeface="Calibri" pitchFamily="34" charset="-122"/>
                           <a:cs typeface="Calibri" pitchFamily="34" charset="-120"/>
                         </a:rPr>
-                        <a:t>Enterprise value at 3.0× revenue (11× EBITDA cross-checks at ₹220 Cr)</a:t>
+                        <a:t>Enterprise value at 3.0× revenue (11× EBITDA cross-checks at ₹225 Cr)</a:t>
                       </a:r>
                       <a:endParaRPr lang="en-US" sz="1100" dirty="0">
                         <a:latin typeface="Calibri" charset="0"/>
@@ -11190,7 +11190,7 @@
                           <a:ea typeface="Calibri" pitchFamily="34" charset="-122"/>
                           <a:cs typeface="Calibri" pitchFamily="34" charset="-120"/>
                         </a:rPr>
-                        <a:t>₹209 Cr</a:t>
+                        <a:t>₹212 Cr</a:t>
                       </a:r>
                       <a:endParaRPr lang="en-US" sz="1100" dirty="0">
                         <a:latin typeface="Calibri" charset="0"/>
@@ -11328,7 +11328,7 @@
                           <a:ea typeface="Calibri" pitchFamily="34" charset="-122"/>
                           <a:cs typeface="Calibri" pitchFamily="34" charset="-120"/>
                         </a:rPr>
-                        <a:t>₹201 Cr</a:t>
+                        <a:t>₹204 Cr</a:t>
                       </a:r>
                       <a:endParaRPr lang="en-US" sz="1100" dirty="0">
                         <a:latin typeface="Calibri" charset="0"/>
@@ -11466,7 +11466,7 @@
                           <a:ea typeface="Calibri" pitchFamily="34" charset="-122"/>
                           <a:cs typeface="Calibri" pitchFamily="34" charset="-120"/>
                         </a:rPr>
-                        <a:t>₹30 Cr</a:t>
+                        <a:t>₹31 Cr</a:t>
                       </a:r>
                       <a:endParaRPr lang="en-US" sz="1100" dirty="0">
                         <a:latin typeface="Calibri" charset="0"/>
@@ -11604,7 +11604,7 @@
                           <a:ea typeface="Calibri" pitchFamily="34" charset="-122"/>
                           <a:cs typeface="Calibri" pitchFamily="34" charset="-120"/>
                         </a:rPr>
-                        <a:t>13.7%</a:t>
+                        <a:t>14.0%</a:t>
                       </a:r>
                       <a:endParaRPr lang="en-US" sz="1100" dirty="0">
                         <a:latin typeface="Calibri" charset="0"/>
@@ -11979,7 +11979,7 @@
                           <a:ea typeface="Calibri" pitchFamily="34" charset="-122"/>
                           <a:cs typeface="Calibri" pitchFamily="34" charset="-120"/>
                         </a:rPr>
-                        <a:t>18.2%</a:t>
+                        <a:t>17.9%</a:t>
                       </a:r>
                       <a:endParaRPr lang="en-US" sz="1100" dirty="0">
                         <a:latin typeface="Calibri" charset="0"/>
@@ -12047,7 +12047,7 @@
                           <a:ea typeface="Calibri" pitchFamily="34" charset="-122"/>
                           <a:cs typeface="Calibri" pitchFamily="34" charset="-120"/>
                         </a:rPr>
-                        <a:t>₹72 Cr</a:t>
+                        <a:t>₹73 Cr</a:t>
                       </a:r>
                       <a:endParaRPr lang="en-US" sz="1100" dirty="0">
                         <a:latin typeface="Calibri" charset="0"/>
@@ -12185,7 +12185,7 @@
                           <a:ea typeface="Calibri" pitchFamily="34" charset="-122"/>
                           <a:cs typeface="Calibri" pitchFamily="34" charset="-120"/>
                         </a:rPr>
-                        <a:t>21.5%</a:t>
+                        <a:t>21.2%</a:t>
                       </a:r>
                       <a:endParaRPr lang="en-US" sz="1100" dirty="0">
                         <a:latin typeface="Calibri" charset="0"/>
@@ -12253,7 +12253,7 @@
                           <a:ea typeface="Calibri" pitchFamily="34" charset="-122"/>
                           <a:cs typeface="Calibri" pitchFamily="34" charset="-120"/>
                         </a:rPr>
-                        <a:t>₹59 Cr</a:t>
+                        <a:t>₹60 Cr</a:t>
                       </a:r>
                       <a:endParaRPr lang="en-US" sz="1100" dirty="0">
                         <a:latin typeface="Calibri" charset="0"/>
@@ -12391,7 +12391,7 @@
                           <a:ea typeface="Calibri" pitchFamily="34" charset="-122"/>
                           <a:cs typeface="Calibri" pitchFamily="34" charset="-120"/>
                         </a:rPr>
-                        <a:t>24.2%</a:t>
+                        <a:t>23.9%</a:t>
                       </a:r>
                       <a:endParaRPr lang="en-US" sz="1100" dirty="0">
                         <a:latin typeface="Calibri" charset="0"/>
@@ -12459,7 +12459,7 @@
                           <a:ea typeface="Calibri" pitchFamily="34" charset="-122"/>
                           <a:cs typeface="Calibri" pitchFamily="34" charset="-120"/>
                         </a:rPr>
-                        <a:t>₹50 Cr</a:t>
+                        <a:t>₹51 Cr</a:t>
                       </a:r>
                       <a:endParaRPr lang="en-US" sz="1100" dirty="0">
                         <a:latin typeface="Calibri" charset="0"/>
@@ -12865,7 +12865,7 @@
                 <a:ea typeface="Calibri" pitchFamily="34" charset="-122"/>
                 <a:cs typeface="Calibri" pitchFamily="34" charset="-120"/>
               </a:rPr>
-              <a:t>At ₹90 crore pre-money an investor earns 13.7% over five years — an argument about counterparty, not valuation.</a:t>
+              <a:t>At ₹90 crore pre-money an investor earns 14.0% over five years — an argument about counterparty, not valuation.</a:t>
             </a:r>
             <a:endParaRPr lang="en-US" sz="900" dirty="0"/>
           </a:p>
@@ -13497,7 +13497,7 @@
                 <a:ea typeface="Calibri" pitchFamily="34" charset="-122"/>
                 <a:cs typeface="Calibri" pitchFamily="34" charset="-120"/>
               </a:rPr>
-              <a:t>2.55×</a:t>
+              <a:t>2.51×</a:t>
             </a:r>
             <a:endParaRPr lang="en-US" sz="2600" dirty="0"/>
           </a:p>
@@ -13688,7 +13688,7 @@
                 <a:ea typeface="Calibri" pitchFamily="34" charset="-122"/>
                 <a:cs typeface="Calibri" pitchFamily="34" charset="-120"/>
               </a:rPr>
-              <a:t>Over seven years, against ₹30 Cr for the equivalent equity</a:t>
+              <a:t>Over seven years, against ₹31 Cr for the equivalent equity</a:t>
             </a:r>
             <a:endParaRPr lang="en-US" sz="950" dirty="0"/>
           </a:p>
@@ -13838,7 +13838,7 @@
                 <a:ea typeface="Calibri" pitchFamily="34" charset="-122"/>
                 <a:cs typeface="Calibri" pitchFamily="34" charset="-120"/>
               </a:rPr>
-              <a:t>₹10 Cr collateral-free at 12.70% costs ₹5.70 Cr over seven years — against ₹30 Cr for the equivalent equity, on the company's own projections.</a:t>
+              <a:t>₹10 Cr collateral-free at 12.70% costs ₹5.70 Cr over seven years — against ₹31 Cr for the equivalent equity, on the company's own projections.</a:t>
             </a:r>
             <a:endParaRPr lang="en-US" sz="950" dirty="0"/>
           </a:p>
@@ -14995,7 +14995,7 @@
                           <a:ea typeface="Calibri" pitchFamily="34" charset="-122"/>
                           <a:cs typeface="Calibri" pitchFamily="34" charset="-120"/>
                         </a:rPr>
-                        <a:t>21.2%</a:t>
+                        <a:t>21.5%</a:t>
                       </a:r>
                       <a:endParaRPr lang="en-US" sz="1100" dirty="0">
                         <a:latin typeface="Calibri" charset="0"/>
@@ -15133,7 +15133,7 @@
                           <a:ea typeface="Calibri" pitchFamily="34" charset="-122"/>
                           <a:cs typeface="Calibri" pitchFamily="34" charset="-120"/>
                         </a:rPr>
-                        <a:t>2.42×</a:t>
+                        <a:t>2.45×</a:t>
                       </a:r>
                       <a:endParaRPr lang="en-US" sz="1100" dirty="0">
                         <a:latin typeface="Calibri" charset="0"/>
@@ -15333,7 +15333,7 @@
                 <a:ea typeface="Calibri" pitchFamily="34" charset="-122"/>
                 <a:cs typeface="Calibri" pitchFamily="34" charset="-120"/>
               </a:rPr>
-              <a:t>21.2% against 13.7% for straight equity at the same valuation and exit. Dilution is deferred three years, and 13.0% converted at ₹92 Cr is cheaper than 15.1% sold today at ₹90 crore pre-money.</a:t>
+              <a:t>21.5% against 14.0% for straight equity at the same valuation and exit. Dilution is deferred three years, and 13.0% converted at ₹92 Cr is cheaper than 15.1% sold today at ₹90 crore pre-money.</a:t>
             </a:r>
             <a:endParaRPr lang="en-US" sz="1200" dirty="0"/>
           </a:p>
@@ -15675,7 +15675,7 @@
                 <a:ea typeface="Calibri" pitchFamily="34" charset="-122"/>
                 <a:cs typeface="Calibri" pitchFamily="34" charset="-120"/>
               </a:rPr>
-              <a:t>13.7%</a:t>
+              <a:t>14.0%</a:t>
             </a:r>
             <a:endParaRPr lang="en-US" sz="3000" dirty="0"/>
           </a:p>
@@ -16008,7 +16008,7 @@
                 <a:ea typeface="Calibri" pitchFamily="34" charset="-122"/>
                 <a:cs typeface="Calibri" pitchFamily="34" charset="-120"/>
               </a:rPr>
-              <a:t>₹30 Cr</a:t>
+              <a:t>₹31 Cr</a:t>
             </a:r>
             <a:endParaRPr lang="en-US" sz="950" dirty="0"/>
           </a:p>
@@ -16825,7 +16825,7 @@
                 <a:ea typeface="Calibri" pitchFamily="34" charset="-122"/>
                 <a:cs typeface="Calibri" pitchFamily="34" charset="-120"/>
               </a:rPr>
-              <a:t>21.2%</a:t>
+              <a:t>21.5%</a:t>
             </a:r>
             <a:endParaRPr lang="en-US" sz="3000" dirty="0"/>
           </a:p>

--- a/pptx/EOD-Company-Capital-Structure.pptx
+++ b/pptx/EOD-Company-Capital-Structure.pptx
@@ -1347,25 +1347,25 @@
                 <c:formatCode>General</c:formatCode>
                 <c:ptCount val="7"/>
                 <c:pt idx="0">
-                  <c:v>5.51</c:v>
+                  <c:v>5.53</c:v>
                 </c:pt>
                 <c:pt idx="1">
-                  <c:v>7.38</c:v>
+                  <c:v>7.42</c:v>
                 </c:pt>
                 <c:pt idx="2">
-                  <c:v>13.18</c:v>
+                  <c:v>13.22</c:v>
                 </c:pt>
                 <c:pt idx="3">
-                  <c:v>17.07</c:v>
+                  <c:v>17.11</c:v>
                 </c:pt>
                 <c:pt idx="4">
-                  <c:v>20.49</c:v>
+                  <c:v>20.54</c:v>
                 </c:pt>
                 <c:pt idx="5">
-                  <c:v>21.72</c:v>
+                  <c:v>21.77</c:v>
                 </c:pt>
                 <c:pt idx="6">
-                  <c:v>22.95</c:v>
+                  <c:v>23</c:v>
                 </c:pt>
               </c:numCache>
             </c:numRef>
@@ -10394,7 +10394,7 @@
                 <a:ea typeface="Calibri" pitchFamily="34" charset="-122"/>
                 <a:cs typeface="Calibri" pitchFamily="34" charset="-120"/>
               </a:rPr>
-              <a:t>₹20 Cr</a:t>
+              <a:t>₹21 Cr</a:t>
             </a:r>
             <a:endParaRPr lang="en-US" sz="2600" dirty="0"/>
           </a:p>
@@ -10436,7 +10436,7 @@
                 <a:ea typeface="Calibri" pitchFamily="34" charset="-122"/>
                 <a:cs typeface="Calibri" pitchFamily="34" charset="-120"/>
               </a:rPr>
-              <a:t>29.0% margin</a:t>
+              <a:t>29.1% margin</a:t>
             </a:r>
             <a:endParaRPr lang="en-US" sz="950" dirty="0"/>
           </a:p>
@@ -11122,7 +11122,7 @@
                           <a:ea typeface="Calibri" pitchFamily="34" charset="-122"/>
                           <a:cs typeface="Calibri" pitchFamily="34" charset="-120"/>
                         </a:rPr>
-                        <a:t>Enterprise value at 3.0× revenue (11× EBITDA cross-checks at ₹225 Cr)</a:t>
+                        <a:t>Enterprise value at 3.0× revenue (11× EBITDA cross-checks at ₹226 Cr)</a:t>
                       </a:r>
                       <a:endParaRPr lang="en-US" sz="1100" dirty="0">
                         <a:latin typeface="Calibri" charset="0"/>
@@ -13497,7 +13497,7 @@
                 <a:ea typeface="Calibri" pitchFamily="34" charset="-122"/>
                 <a:cs typeface="Calibri" pitchFamily="34" charset="-120"/>
               </a:rPr>
-              <a:t>2.51×</a:t>
+              <a:t>2.52×</a:t>
             </a:r>
             <a:endParaRPr lang="en-US" sz="2600" dirty="0"/>
           </a:p>
